--- a/大三上/软件设计模式/重制版PPT/11 工厂方法模式（重制版）.pptx
+++ b/大三上/软件设计模式/重制版PPT/11 工厂方法模式（重制版）.pptx
@@ -1464,10 +1464,10 @@
         </p:nvGrpSpPr>
         <p:grpSpPr>
           <a:xfrm>
-            <a:off x="1726882" y="2410778"/>
-            <a:ext cx="8750618" cy="2441258"/>
-            <a:chOff x="1726882" y="2410778"/>
-            <a:chExt cx="8750618" cy="2441258"/>
+            <a:off x="1726882" y="2424112"/>
+            <a:ext cx="8750618" cy="2467928"/>
+            <a:chOff x="1726882" y="2424112"/>
+            <a:chExt cx="8750618" cy="2467928"/>
           </a:xfrm>
         </p:grpSpPr>
         <p:sp>
@@ -1478,7 +1478,7 @@
           </p:nvSpPr>
           <p:spPr>
             <a:xfrm>
-              <a:off x="3048952" y="2807970"/>
+              <a:off x="3048952" y="2821305"/>
               <a:ext cx="2099310" cy="9525"/>
             </a:xfrm>
             <a:custGeom>
@@ -1517,8 +1517,8 @@
           </p:nvSpPr>
           <p:spPr>
             <a:xfrm>
-              <a:off x="5043488" y="2750820"/>
-              <a:ext cx="104775" cy="115252"/>
+              <a:off x="5043488" y="2764155"/>
+              <a:ext cx="104775" cy="115253"/>
             </a:xfrm>
             <a:custGeom>
               <a:avLst/>
@@ -1527,9 +1527,9 @@
               <a:cxnLst/>
               <a:rect l="l" t="t" r="r" b="b"/>
               <a:pathLst>
-                <a:path w="104775" h="115252">
+                <a:path w="104775" h="115253">
                   <a:moveTo>
-                    <a:pt x="0" y="115252"/>
+                    <a:pt x="0" y="115253"/>
                   </a:moveTo>
                   <a:lnTo>
                     <a:pt x="104775" y="57150"/>
@@ -1556,7 +1556,7 @@
           </p:nvSpPr>
           <p:spPr>
             <a:xfrm>
-              <a:off x="7043738" y="2807970"/>
+              <a:off x="7043738" y="2821305"/>
               <a:ext cx="2096453" cy="9525"/>
             </a:xfrm>
             <a:custGeom>
@@ -1595,8 +1595,8 @@
           </p:nvSpPr>
           <p:spPr>
             <a:xfrm>
-              <a:off x="9035415" y="2750820"/>
-              <a:ext cx="104775" cy="115252"/>
+              <a:off x="9035415" y="2764155"/>
+              <a:ext cx="104775" cy="115253"/>
             </a:xfrm>
             <a:custGeom>
               <a:avLst/>
@@ -1605,9 +1605,9 @@
               <a:cxnLst/>
               <a:rect l="l" t="t" r="r" b="b"/>
               <a:pathLst>
-                <a:path w="104775" h="115252">
+                <a:path w="104775" h="115253">
                   <a:moveTo>
-                    <a:pt x="0" y="115252"/>
+                    <a:pt x="0" y="115253"/>
                   </a:moveTo>
                   <a:lnTo>
                     <a:pt x="104775" y="57150"/>
@@ -1634,8 +1634,8 @@
           </p:nvSpPr>
           <p:spPr>
             <a:xfrm>
-              <a:off x="6096000" y="3331845"/>
-              <a:ext cx="9525" cy="900112"/>
+              <a:off x="6096000" y="3345180"/>
+              <a:ext cx="9525" cy="926783"/>
             </a:xfrm>
             <a:custGeom>
               <a:avLst/>
@@ -1644,9 +1644,9 @@
               <a:cxnLst/>
               <a:rect l="l" t="t" r="r" b="b"/>
               <a:pathLst>
-                <a:path w="9525" h="900112">
+                <a:path w="9525" h="926783">
                   <a:moveTo>
-                    <a:pt x="0" y="900112"/>
+                    <a:pt x="0" y="926783"/>
                   </a:moveTo>
                   <a:lnTo>
                     <a:pt x="0" y="0"/>
@@ -1670,7 +1670,7 @@
           </p:nvSpPr>
           <p:spPr>
             <a:xfrm>
-              <a:off x="6022658" y="3206115"/>
+              <a:off x="6022658" y="3219450"/>
               <a:ext cx="146685" cy="125730"/>
             </a:xfrm>
             <a:custGeom>
@@ -1712,8 +1712,8 @@
           </p:nvSpPr>
           <p:spPr>
             <a:xfrm>
-              <a:off x="9804082" y="3318510"/>
-              <a:ext cx="9525" cy="913448"/>
+              <a:off x="9804082" y="3331845"/>
+              <a:ext cx="9525" cy="940117"/>
             </a:xfrm>
             <a:custGeom>
               <a:avLst/>
@@ -1722,9 +1722,9 @@
               <a:cxnLst/>
               <a:rect l="l" t="t" r="r" b="b"/>
               <a:pathLst>
-                <a:path w="9525" h="913448">
+                <a:path w="9525" h="940117">
                   <a:moveTo>
-                    <a:pt x="0" y="913448"/>
+                    <a:pt x="0" y="940117"/>
                   </a:moveTo>
                   <a:lnTo>
                     <a:pt x="0" y="0"/>
@@ -1751,7 +1751,7 @@
           </p:nvSpPr>
           <p:spPr>
             <a:xfrm>
-              <a:off x="9730740" y="3192780"/>
+              <a:off x="9730740" y="3206115"/>
               <a:ext cx="146685" cy="125730"/>
             </a:xfrm>
             <a:custGeom>
@@ -1793,7 +1793,7 @@
           </p:nvSpPr>
           <p:spPr>
             <a:xfrm>
-              <a:off x="7043738" y="4541520"/>
+              <a:off x="7043738" y="4581525"/>
               <a:ext cx="2087880" cy="9525"/>
             </a:xfrm>
             <a:custGeom>
@@ -1832,8 +1832,8 @@
           </p:nvSpPr>
           <p:spPr>
             <a:xfrm>
-              <a:off x="9026842" y="4484370"/>
-              <a:ext cx="104775" cy="115252"/>
+              <a:off x="9026842" y="4524375"/>
+              <a:ext cx="104775" cy="115253"/>
             </a:xfrm>
             <a:custGeom>
               <a:avLst/>
@@ -1842,9 +1842,9 @@
               <a:cxnLst/>
               <a:rect l="l" t="t" r="r" b="b"/>
               <a:pathLst>
-                <a:path w="104775" h="115252">
+                <a:path w="104775" h="115253">
                   <a:moveTo>
-                    <a:pt x="0" y="115252"/>
+                    <a:pt x="0" y="115253"/>
                   </a:moveTo>
                   <a:lnTo>
                     <a:pt x="104775" y="57150"/>
@@ -1871,7 +1871,7 @@
           </p:nvSpPr>
           <p:spPr>
             <a:xfrm>
-              <a:off x="1726882" y="2410778"/>
+              <a:off x="1726882" y="2424112"/>
               <a:ext cx="1322070" cy="795338"/>
             </a:xfrm>
             <a:prstGeom prst="rect">
@@ -1895,7 +1895,7 @@
           </p:nvSpPr>
           <p:spPr>
             <a:xfrm>
-              <a:off x="1733550" y="2417445"/>
+              <a:off x="1733550" y="2430780"/>
               <a:ext cx="1307782" cy="245745"/>
             </a:xfrm>
             <a:prstGeom prst="rect">
@@ -1917,7 +1917,7 @@
           </p:nvSpPr>
           <p:spPr>
             <a:xfrm>
-              <a:off x="1726882" y="2659380"/>
+              <a:off x="1726882" y="2672715"/>
               <a:ext cx="1322070" cy="9525"/>
             </a:xfrm>
             <a:prstGeom prst="rect">
@@ -1939,7 +1939,7 @@
           </p:nvSpPr>
           <p:spPr>
             <a:xfrm>
-              <a:off x="1726882" y="2929890"/>
+              <a:off x="1726882" y="2943225"/>
               <a:ext cx="1322070" cy="9525"/>
             </a:xfrm>
             <a:prstGeom prst="rect">
@@ -1961,7 +1961,7 @@
           </p:nvSpPr>
           <p:spPr>
             <a:xfrm>
-              <a:off x="5148262" y="2410778"/>
+              <a:off x="5148262" y="2424112"/>
               <a:ext cx="1894522" cy="795338"/>
             </a:xfrm>
             <a:prstGeom prst="rect">
@@ -1985,7 +1985,7 @@
           </p:nvSpPr>
           <p:spPr>
             <a:xfrm>
-              <a:off x="5155882" y="2417445"/>
+              <a:off x="5155882" y="2430780"/>
               <a:ext cx="1880235" cy="245745"/>
             </a:xfrm>
             <a:prstGeom prst="rect">
@@ -2007,7 +2007,7 @@
           </p:nvSpPr>
           <p:spPr>
             <a:xfrm>
-              <a:off x="5148262" y="2659380"/>
+              <a:off x="5148262" y="2672715"/>
               <a:ext cx="1894522" cy="9525"/>
             </a:xfrm>
             <a:prstGeom prst="rect">
@@ -2029,7 +2029,7 @@
           </p:nvSpPr>
           <p:spPr>
             <a:xfrm>
-              <a:off x="5148262" y="2754630"/>
+              <a:off x="5148262" y="2767965"/>
               <a:ext cx="1894522" cy="9525"/>
             </a:xfrm>
             <a:prstGeom prst="rect">
@@ -2051,7 +2051,7 @@
           </p:nvSpPr>
           <p:spPr>
             <a:xfrm>
-              <a:off x="9140190" y="2424112"/>
+              <a:off x="9140190" y="2437448"/>
               <a:ext cx="1328738" cy="768668"/>
             </a:xfrm>
             <a:prstGeom prst="rect">
@@ -2075,7 +2075,7 @@
           </p:nvSpPr>
           <p:spPr>
             <a:xfrm>
-              <a:off x="9146858" y="2431732"/>
+              <a:off x="9146858" y="2445068"/>
               <a:ext cx="1314450" cy="394335"/>
             </a:xfrm>
             <a:prstGeom prst="rect">
@@ -2097,7 +2097,7 @@
           </p:nvSpPr>
           <p:spPr>
             <a:xfrm>
-              <a:off x="9140190" y="2821305"/>
+              <a:off x="9140190" y="2834640"/>
               <a:ext cx="1328738" cy="9525"/>
             </a:xfrm>
             <a:prstGeom prst="rect">
@@ -2119,7 +2119,7 @@
           </p:nvSpPr>
           <p:spPr>
             <a:xfrm>
-              <a:off x="9140190" y="2916555"/>
+              <a:off x="9140190" y="2929890"/>
               <a:ext cx="1328738" cy="9525"/>
             </a:xfrm>
             <a:prstGeom prst="rect">
@@ -2141,7 +2141,7 @@
           </p:nvSpPr>
           <p:spPr>
             <a:xfrm>
-              <a:off x="5148262" y="4231958"/>
+              <a:off x="5148262" y="4271962"/>
               <a:ext cx="1894522" cy="620078"/>
             </a:xfrm>
             <a:prstGeom prst="rect">
@@ -2165,7 +2165,7 @@
           </p:nvSpPr>
           <p:spPr>
             <a:xfrm>
-              <a:off x="5155882" y="4239578"/>
+              <a:off x="5155882" y="4278630"/>
               <a:ext cx="1880235" cy="245745"/>
             </a:xfrm>
             <a:prstGeom prst="rect">
@@ -2187,7 +2187,7 @@
           </p:nvSpPr>
           <p:spPr>
             <a:xfrm>
-              <a:off x="5148262" y="4480560"/>
+              <a:off x="5148262" y="4520565"/>
               <a:ext cx="1894522" cy="9525"/>
             </a:xfrm>
             <a:prstGeom prst="rect">
@@ -2209,7 +2209,7 @@
           </p:nvSpPr>
           <p:spPr>
             <a:xfrm>
-              <a:off x="5148262" y="4575810"/>
+              <a:off x="5148262" y="4615815"/>
               <a:ext cx="1894522" cy="9525"/>
             </a:xfrm>
             <a:prstGeom prst="rect">
@@ -2231,7 +2231,7 @@
           </p:nvSpPr>
           <p:spPr>
             <a:xfrm>
-              <a:off x="9131618" y="4231958"/>
+              <a:off x="9131618" y="4271962"/>
               <a:ext cx="1345882" cy="620078"/>
             </a:xfrm>
             <a:prstGeom prst="rect">
@@ -2255,7 +2255,7 @@
           </p:nvSpPr>
           <p:spPr>
             <a:xfrm>
-              <a:off x="9138285" y="4239578"/>
+              <a:off x="9138285" y="4278630"/>
               <a:ext cx="1331595" cy="245745"/>
             </a:xfrm>
             <a:prstGeom prst="rect">
@@ -2277,7 +2277,7 @@
           </p:nvSpPr>
           <p:spPr>
             <a:xfrm>
-              <a:off x="9131618" y="4480560"/>
+              <a:off x="9131618" y="4520565"/>
               <a:ext cx="1345882" cy="9525"/>
             </a:xfrm>
             <a:prstGeom prst="rect">
@@ -2299,7 +2299,7 @@
           </p:nvSpPr>
           <p:spPr>
             <a:xfrm>
-              <a:off x="9131618" y="4575810"/>
+              <a:off x="9131618" y="4615815"/>
               <a:ext cx="1345882" cy="9525"/>
             </a:xfrm>
             <a:prstGeom prst="rect">
@@ -2321,7 +2321,7 @@
           </p:nvSpPr>
           <p:spPr>
             <a:xfrm>
-              <a:off x="2172837" y="2470785"/>
+              <a:off x="2172837" y="2484120"/>
               <a:ext cx="430160" cy="205359"/>
             </a:xfrm>
             <a:prstGeom prst="rect">
@@ -2361,7 +2361,7 @@
           </p:nvSpPr>
           <p:spPr>
             <a:xfrm>
-              <a:off x="1798130" y="2730341"/>
+              <a:off x="1798130" y="2743676"/>
               <a:ext cx="1255039" cy="190690"/>
             </a:xfrm>
             <a:prstGeom prst="rect">
@@ -2401,7 +2401,7 @@
           </p:nvSpPr>
           <p:spPr>
             <a:xfrm>
-              <a:off x="1798130" y="3000851"/>
+              <a:off x="1798130" y="3014186"/>
               <a:ext cx="854243" cy="190690"/>
             </a:xfrm>
             <a:prstGeom prst="rect">
@@ -2441,7 +2441,7 @@
           </p:nvSpPr>
           <p:spPr>
             <a:xfrm>
-              <a:off x="5802650" y="2470785"/>
+              <a:off x="5802650" y="2484120"/>
               <a:ext cx="586700" cy="205359"/>
             </a:xfrm>
             <a:prstGeom prst="rect">
@@ -2481,7 +2481,7 @@
           </p:nvSpPr>
           <p:spPr>
             <a:xfrm>
-              <a:off x="5219510" y="2825591"/>
+              <a:off x="5219510" y="2838926"/>
               <a:ext cx="1752346" cy="366903"/>
             </a:xfrm>
             <a:prstGeom prst="rect">
@@ -2537,7 +2537,7 @@
           </p:nvSpPr>
           <p:spPr>
             <a:xfrm>
-              <a:off x="9447962" y="2481262"/>
+              <a:off x="9447962" y="2494598"/>
               <a:ext cx="712241" cy="176212"/>
             </a:xfrm>
             <a:prstGeom prst="rect">
@@ -2577,7 +2577,7 @@
           </p:nvSpPr>
           <p:spPr>
             <a:xfrm>
-              <a:off x="9510733" y="2632710"/>
+              <a:off x="9510733" y="2646045"/>
               <a:ext cx="586700" cy="205359"/>
             </a:xfrm>
             <a:prstGeom prst="rect">
@@ -2617,7 +2617,7 @@
           </p:nvSpPr>
           <p:spPr>
             <a:xfrm>
-              <a:off x="9211437" y="2987516"/>
+              <a:off x="9211437" y="3000851"/>
               <a:ext cx="1256622" cy="190690"/>
             </a:xfrm>
             <a:prstGeom prst="rect">
@@ -2657,7 +2657,7 @@
           </p:nvSpPr>
           <p:spPr>
             <a:xfrm>
-              <a:off x="5473819" y="4291965"/>
+              <a:off x="5473819" y="4331970"/>
               <a:ext cx="1244362" cy="205359"/>
             </a:xfrm>
             <a:prstGeom prst="rect">
@@ -2697,7 +2697,7 @@
           </p:nvSpPr>
           <p:spPr>
             <a:xfrm>
-              <a:off x="5219510" y="4646771"/>
+              <a:off x="5219510" y="4686776"/>
               <a:ext cx="1867347" cy="190690"/>
             </a:xfrm>
             <a:prstGeom prst="rect">
@@ -2737,7 +2737,7 @@
           </p:nvSpPr>
           <p:spPr>
             <a:xfrm>
-              <a:off x="9181901" y="4291965"/>
+              <a:off x="9181901" y="4331970"/>
               <a:ext cx="1244362" cy="205359"/>
             </a:xfrm>
             <a:prstGeom prst="rect">
@@ -2777,7 +2777,7 @@
           </p:nvSpPr>
           <p:spPr>
             <a:xfrm>
-              <a:off x="9202864" y="4646771"/>
+              <a:off x="9202864" y="4686776"/>
               <a:ext cx="1256622" cy="190690"/>
             </a:xfrm>
             <a:prstGeom prst="rect">
@@ -2817,7 +2817,7 @@
           </p:nvSpPr>
           <p:spPr>
             <a:xfrm>
-              <a:off x="3926205" y="2602230"/>
+              <a:off x="3926205" y="2615565"/>
               <a:ext cx="343852" cy="179070"/>
             </a:xfrm>
             <a:prstGeom prst="roundRect">
@@ -2841,7 +2841,7 @@
           </p:nvSpPr>
           <p:spPr>
             <a:xfrm>
-              <a:off x="3961727" y="2626519"/>
+              <a:off x="3961727" y="2639854"/>
               <a:ext cx="273761" cy="190690"/>
             </a:xfrm>
             <a:prstGeom prst="rect">
@@ -2881,7 +2881,7 @@
           </p:nvSpPr>
           <p:spPr>
             <a:xfrm>
-              <a:off x="7920038" y="2602230"/>
+              <a:off x="7920038" y="2615565"/>
               <a:ext cx="343852" cy="179070"/>
             </a:xfrm>
             <a:prstGeom prst="roundRect">
@@ -2905,7 +2905,7 @@
           </p:nvSpPr>
           <p:spPr>
             <a:xfrm>
-              <a:off x="7954607" y="2626519"/>
+              <a:off x="7954607" y="2639854"/>
               <a:ext cx="273761" cy="190690"/>
             </a:xfrm>
             <a:prstGeom prst="rect">
@@ -2945,7 +2945,7 @@
           </p:nvSpPr>
           <p:spPr>
             <a:xfrm>
-              <a:off x="7765732" y="4335780"/>
+              <a:off x="7765732" y="4375785"/>
               <a:ext cx="642938" cy="179070"/>
             </a:xfrm>
             <a:prstGeom prst="roundRect">
@@ -2969,7 +2969,7 @@
           </p:nvSpPr>
           <p:spPr>
             <a:xfrm>
-              <a:off x="7792484" y="4360069"/>
+              <a:off x="7792484" y="4400074"/>
               <a:ext cx="590387" cy="190690"/>
             </a:xfrm>
             <a:prstGeom prst="rect">
@@ -4553,9 +4553,9 @@
         <p:grpSpPr>
           <a:xfrm>
             <a:off x="533400" y="4865370"/>
-            <a:ext cx="6492240" cy="1253490"/>
+            <a:ext cx="6492240" cy="971550"/>
             <a:chOff x="533400" y="4865370"/>
-            <a:chExt cx="6492240" cy="1253490"/>
+            <a:chExt cx="6492240" cy="971550"/>
           </a:xfrm>
         </p:grpSpPr>
         <p:sp>
@@ -4567,11 +4567,11 @@
           <p:spPr>
             <a:xfrm>
               <a:off x="533400" y="4865370"/>
-              <a:ext cx="6492240" cy="1253490"/>
+              <a:ext cx="6492240" cy="971550"/>
             </a:xfrm>
             <a:prstGeom prst="roundRect">
               <a:avLst>
-                <a:gd name="adj" fmla="val 9119"/>
+                <a:gd name="adj" fmla="val 11765"/>
               </a:avLst>
             </a:prstGeom>
             <a:solidFill>
@@ -4590,9 +4590,9 @@
           </p:nvGrpSpPr>
           <p:grpSpPr>
             <a:xfrm>
-              <a:off x="726129" y="5388411"/>
+              <a:off x="726129" y="5247441"/>
               <a:ext cx="224134" cy="192560"/>
-              <a:chOff x="726129" y="5388411"/>
+              <a:chOff x="726129" y="5247441"/>
               <a:chExt cx="224134" cy="192560"/>
             </a:xfrm>
           </p:grpSpPr>
@@ -4604,7 +4604,7 @@
             </p:nvSpPr>
             <p:spPr>
               <a:xfrm>
-                <a:off x="838200" y="5458778"/>
+                <a:off x="838200" y="5317808"/>
                 <a:ext cx="9525" cy="44450"/>
               </a:xfrm>
               <a:custGeom>
@@ -4640,7 +4640,7 @@
             </p:nvSpPr>
             <p:spPr>
               <a:xfrm>
-                <a:off x="726129" y="5388411"/>
+                <a:off x="726129" y="5247441"/>
                 <a:ext cx="224134" cy="192560"/>
               </a:xfrm>
               <a:custGeom>
@@ -4712,7 +4712,7 @@
             </p:nvSpPr>
             <p:spPr>
               <a:xfrm>
-                <a:off x="838200" y="5536566"/>
+                <a:off x="838200" y="5395596"/>
                 <a:ext cx="9525" cy="9525"/>
               </a:xfrm>
               <a:custGeom>
@@ -4749,7 +4749,7 @@
           </p:nvSpPr>
           <p:spPr>
             <a:xfrm>
-              <a:off x="1040130" y="5249228"/>
+              <a:off x="1040130" y="5108258"/>
               <a:ext cx="5539740" cy="569595"/>
             </a:xfrm>
             <a:prstGeom prst="rect">
@@ -5374,9 +5374,9 @@
         <p:grpSpPr>
           <a:xfrm>
             <a:off x="7322820" y="4316730"/>
-            <a:ext cx="4335780" cy="1861185"/>
+            <a:ext cx="4335780" cy="1579245"/>
             <a:chOff x="7322820" y="4316730"/>
-            <a:chExt cx="4335780" cy="1861185"/>
+            <a:chExt cx="4335780" cy="1579245"/>
           </a:xfrm>
         </p:grpSpPr>
         <p:sp>
@@ -5388,47 +5388,7 @@
           <p:spPr>
             <a:xfrm>
               <a:off x="7322820" y="4316730"/>
-              <a:ext cx="1630680" cy="293370"/>
-            </a:xfrm>
-            <a:prstGeom prst="rect">
-              <a:avLst/>
-            </a:prstGeom>
-            <a:noFill/>
-            <a:ln>
-              <a:noFill/>
-            </a:ln>
-          </p:spPr>
-          <p:txBody>
-            <a:bodyPr wrap="none" lIns="0" tIns="0" rIns="0" bIns="0" anchor="t" anchorCtr="0">
-              <a:spAutoFit/>
-            </a:bodyPr>
-            <a:lstStyle/>
-            <a:p>
-              <a:pPr algn="l"/>
-              <a:r>
-                <a:rPr lang="zh-CN" sz="1500" b="1" dirty="0">
-                  <a:solidFill>
-                    <a:srgbClr val="5B3FA0"/>
-                  </a:solidFill>
-                  <a:latin typeface="+mn-lt"/>
-                  <a:ea typeface="+mn-ea"/>
-                  <a:cs typeface="+mn-cs"/>
-                </a:rPr>
-                <a:t>抽象工厂写成什么</a:t>
-              </a:r>
-            </a:p>
-          </p:txBody>
-        </p:sp>
-        <p:sp>
-          <p:nvSpPr>
-            <p:cNvPr id="56" name="TextBox 56"/>
-            <p:cNvSpPr txBox="1"/>
-            <p:nvPr/>
-          </p:nvSpPr>
-          <p:spPr>
-            <a:xfrm>
-              <a:off x="9356408" y="4316730"/>
-              <a:ext cx="2110740" cy="857250"/>
+              <a:ext cx="1348740" cy="575310"/>
             </a:xfrm>
             <a:prstGeom prst="rect">
               <a:avLst/>
@@ -5450,92 +5410,18 @@
                 </a:lnSpc>
               </a:pPr>
               <a:r>
-                <a:rPr lang="zh-CN" sz="1500" dirty="0">
-                  <a:solidFill>
-                    <a:srgbClr val="1F2937"/>
-                  </a:solidFill>
-                  <a:latin typeface="+mn-lt"/>
-                  <a:ea typeface="+mn-ea"/>
-                  <a:cs typeface="+mn-cs"/>
-                </a:rPr>
-                <a:t>抽象类或接口都可以，要</a:t>
+                <a:rPr lang="zh-CN" sz="1500" b="1" dirty="0">
+                  <a:solidFill>
+                    <a:srgbClr val="5B3FA0"/>
+                  </a:solidFill>
+                  <a:latin typeface="+mn-lt"/>
+                  <a:ea typeface="+mn-ea"/>
+                  <a:cs typeface="+mn-cs"/>
+                </a:rPr>
+                <a:t>抽象工厂写成什</a:t>
               </a:r>
               <a:br/>
               <a:r>
-                <a:rPr lang="zh-CN" sz="1500" dirty="0">
-                  <a:solidFill>
-                    <a:srgbClr val="1F2937"/>
-                  </a:solidFill>
-                  <a:latin typeface="+mn-lt"/>
-                  <a:ea typeface="+mn-ea"/>
-                  <a:cs typeface="+mn-cs"/>
-                </a:rPr>
-                <a:t>有额外的公共逻辑就用抽</a:t>
-              </a:r>
-              <a:br/>
-              <a:r>
-                <a:rPr lang="zh-CN" sz="1500" dirty="0">
-                  <a:solidFill>
-                    <a:srgbClr val="1F2937"/>
-                  </a:solidFill>
-                  <a:latin typeface="+mn-lt"/>
-                  <a:ea typeface="+mn-ea"/>
-                  <a:cs typeface="+mn-cs"/>
-                </a:rPr>
-                <a:t>象类</a:t>
-              </a:r>
-            </a:p>
-          </p:txBody>
-        </p:sp>
-        <p:sp>
-          <p:nvSpPr>
-            <p:cNvPr id="57" name="Rectangle 57"/>
-            <p:cNvSpPr/>
-            <p:nvPr/>
-          </p:nvSpPr>
-          <p:spPr>
-            <a:xfrm>
-              <a:off x="7330440" y="5200650"/>
-              <a:ext cx="4328160" cy="9525"/>
-            </a:xfrm>
-            <a:prstGeom prst="rect">
-              <a:avLst/>
-            </a:prstGeom>
-            <a:solidFill>
-              <a:srgbClr val="D9DFEA"/>
-            </a:solidFill>
-            <a:ln>
-              <a:noFill/>
-            </a:ln>
-          </p:spPr>
-        </p:sp>
-        <p:sp>
-          <p:nvSpPr>
-            <p:cNvPr id="58" name="TextBox 58"/>
-            <p:cNvSpPr txBox="1"/>
-            <p:nvPr/>
-          </p:nvSpPr>
-          <p:spPr>
-            <a:xfrm>
-              <a:off x="7322820" y="5320665"/>
-              <a:ext cx="1832610" cy="293370"/>
-            </a:xfrm>
-            <a:prstGeom prst="rect">
-              <a:avLst/>
-            </a:prstGeom>
-            <a:noFill/>
-            <a:ln>
-              <a:noFill/>
-            </a:ln>
-          </p:spPr>
-          <p:txBody>
-            <a:bodyPr wrap="none" lIns="0" tIns="0" rIns="0" bIns="0" anchor="t" anchorCtr="0">
-              <a:spAutoFit/>
-            </a:bodyPr>
-            <a:lstStyle/>
-            <a:p>
-              <a:pPr algn="l"/>
-              <a:r>
                 <a:rPr lang="zh-CN" sz="1500" b="1" dirty="0">
                   <a:solidFill>
                     <a:srgbClr val="5B3FA0"/>
@@ -5544,21 +5430,21 @@
                   <a:ea typeface="+mn-ea"/>
                   <a:cs typeface="+mn-cs"/>
                 </a:rPr>
-                <a:t>成对出现是必须的吗</a:t>
-              </a:r>
-            </a:p>
-          </p:txBody>
-        </p:sp>
-        <p:sp>
-          <p:nvSpPr>
-            <p:cNvPr id="59" name="TextBox 59"/>
-            <p:cNvSpPr txBox="1"/>
-            <p:nvPr/>
-          </p:nvSpPr>
-          <p:spPr>
-            <a:xfrm>
-              <a:off x="9356408" y="5320665"/>
-              <a:ext cx="2110740" cy="857250"/>
+                <a:t>么</a:t>
+              </a:r>
+            </a:p>
+          </p:txBody>
+        </p:sp>
+        <p:sp>
+          <p:nvSpPr>
+            <p:cNvPr id="56" name="TextBox 56"/>
+            <p:cNvSpPr txBox="1"/>
+            <p:nvPr/>
+          </p:nvSpPr>
+          <p:spPr>
+            <a:xfrm>
+              <a:off x="8881110" y="4316730"/>
+              <a:ext cx="2491740" cy="575310"/>
             </a:xfrm>
             <a:prstGeom prst="rect">
               <a:avLst/>
@@ -5588,7 +5474,7 @@
                   <a:ea typeface="+mn-ea"/>
                   <a:cs typeface="+mn-cs"/>
                 </a:rPr>
-                <a:t>不是，一个具体工厂也可</a:t>
+                <a:t>抽象类或接口都可以，要有额</a:t>
               </a:r>
               <a:br/>
               <a:r>
@@ -5600,10 +5486,120 @@
                   <a:ea typeface="+mn-ea"/>
                   <a:cs typeface="+mn-cs"/>
                 </a:rPr>
-                <a:t>以按参数造几种产品，代</a:t>
+                <a:t>外的公共逻辑就用抽象类</a:t>
+              </a:r>
+            </a:p>
+          </p:txBody>
+        </p:sp>
+        <p:sp>
+          <p:nvSpPr>
+            <p:cNvPr id="57" name="Rectangle 57"/>
+            <p:cNvSpPr/>
+            <p:nvPr/>
+          </p:nvSpPr>
+          <p:spPr>
+            <a:xfrm>
+              <a:off x="7330440" y="4918710"/>
+              <a:ext cx="4328160" cy="9525"/>
+            </a:xfrm>
+            <a:prstGeom prst="rect">
+              <a:avLst/>
+            </a:prstGeom>
+            <a:solidFill>
+              <a:srgbClr val="D9DFEA"/>
+            </a:solidFill>
+            <a:ln>
+              <a:noFill/>
+            </a:ln>
+          </p:spPr>
+        </p:sp>
+        <p:sp>
+          <p:nvSpPr>
+            <p:cNvPr id="58" name="TextBox 58"/>
+            <p:cNvSpPr txBox="1"/>
+            <p:nvPr/>
+          </p:nvSpPr>
+          <p:spPr>
+            <a:xfrm>
+              <a:off x="7322820" y="5038725"/>
+              <a:ext cx="1348740" cy="575310"/>
+            </a:xfrm>
+            <a:prstGeom prst="rect">
+              <a:avLst/>
+            </a:prstGeom>
+            <a:noFill/>
+            <a:ln>
+              <a:noFill/>
+            </a:ln>
+          </p:spPr>
+          <p:txBody>
+            <a:bodyPr wrap="none" lIns="0" tIns="0" rIns="0" bIns="0" anchor="t" anchorCtr="0">
+              <a:spAutoFit/>
+            </a:bodyPr>
+            <a:lstStyle/>
+            <a:p>
+              <a:pPr algn="l">
+                <a:lnSpc>
+                  <a:spcPts val="2220"/>
+                </a:lnSpc>
+              </a:pPr>
+              <a:r>
+                <a:rPr lang="zh-CN" sz="1500" b="1" dirty="0">
+                  <a:solidFill>
+                    <a:srgbClr val="5B3FA0"/>
+                  </a:solidFill>
+                  <a:latin typeface="+mn-lt"/>
+                  <a:ea typeface="+mn-ea"/>
+                  <a:cs typeface="+mn-cs"/>
+                </a:rPr>
+                <a:t>成对出现是必须</a:t>
               </a:r>
               <a:br/>
               <a:r>
+                <a:rPr lang="zh-CN" sz="1500" b="1" dirty="0">
+                  <a:solidFill>
+                    <a:srgbClr val="5B3FA0"/>
+                  </a:solidFill>
+                  <a:latin typeface="+mn-lt"/>
+                  <a:ea typeface="+mn-ea"/>
+                  <a:cs typeface="+mn-cs"/>
+                </a:rPr>
+                <a:t>的吗</a:t>
+              </a:r>
+            </a:p>
+          </p:txBody>
+        </p:sp>
+        <p:sp>
+          <p:nvSpPr>
+            <p:cNvPr id="59" name="TextBox 59"/>
+            <p:cNvSpPr txBox="1"/>
+            <p:nvPr/>
+          </p:nvSpPr>
+          <p:spPr>
+            <a:xfrm>
+              <a:off x="8881110" y="5038725"/>
+              <a:ext cx="2567940" cy="857250"/>
+            </a:xfrm>
+            <a:prstGeom prst="rect">
+              <a:avLst/>
+            </a:prstGeom>
+            <a:noFill/>
+            <a:ln>
+              <a:noFill/>
+            </a:ln>
+          </p:spPr>
+          <p:txBody>
+            <a:bodyPr wrap="none" lIns="0" tIns="0" rIns="0" bIns="0" anchor="t" anchorCtr="0">
+              <a:spAutoFit/>
+            </a:bodyPr>
+            <a:lstStyle/>
+            <a:p>
+              <a:pPr algn="l">
+                <a:lnSpc>
+                  <a:spcPts val="2220"/>
+                </a:lnSpc>
+              </a:pPr>
+              <a:r>
                 <a:rPr lang="zh-CN" sz="1500" dirty="0">
                   <a:solidFill>
                     <a:srgbClr val="1F2937"/>
@@ -5612,7 +5608,31 @@
                   <a:ea typeface="+mn-ea"/>
                   <a:cs typeface="+mn-cs"/>
                 </a:rPr>
-                <a:t>价见第 30 页</a:t>
+                <a:t>不是，一个具体工厂也可以按</a:t>
+              </a:r>
+              <a:br/>
+              <a:r>
+                <a:rPr lang="zh-CN" sz="1500" dirty="0">
+                  <a:solidFill>
+                    <a:srgbClr val="1F2937"/>
+                  </a:solidFill>
+                  <a:latin typeface="+mn-lt"/>
+                  <a:ea typeface="+mn-ea"/>
+                  <a:cs typeface="+mn-cs"/>
+                </a:rPr>
+                <a:t>参数造几种产品，代价见第 30</a:t>
+              </a:r>
+              <a:br/>
+              <a:r>
+                <a:rPr lang="zh-CN" sz="1500" dirty="0">
+                  <a:solidFill>
+                    <a:srgbClr val="1F2937"/>
+                  </a:solidFill>
+                  <a:latin typeface="+mn-lt"/>
+                  <a:ea typeface="+mn-ea"/>
+                  <a:cs typeface="+mn-cs"/>
+                </a:rPr>
+                <a:t>页</a:t>
               </a:r>
             </a:p>
           </p:txBody>
@@ -16149,7 +16169,7 @@
           <p:spPr>
             <a:xfrm>
               <a:off x="1435418" y="3304222"/>
-              <a:ext cx="1803082" cy="533400"/>
+              <a:ext cx="1707832" cy="533400"/>
             </a:xfrm>
             <a:custGeom>
               <a:avLst/>
@@ -16158,7 +16178,7 @@
               <a:cxnLst/>
               <a:rect l="l" t="t" r="r" b="b"/>
               <a:pathLst>
-                <a:path w="1803082" h="533400">
+                <a:path w="1707832" h="533400">
                   <a:moveTo>
                     <a:pt x="0" y="533400"/>
                   </a:moveTo>
@@ -16166,10 +16186,10 @@
                     <a:pt x="0" y="203835"/>
                   </a:lnTo>
                   <a:lnTo>
-                    <a:pt x="1803082" y="203835"/>
+                    <a:pt x="1707832" y="203835"/>
                   </a:lnTo>
                   <a:lnTo>
-                    <a:pt x="1803082" y="0"/>
+                    <a:pt x="1707832" y="0"/>
                   </a:lnTo>
                 </a:path>
               </a:pathLst>
@@ -16190,7 +16210,7 @@
           </p:nvSpPr>
           <p:spPr>
             <a:xfrm>
-              <a:off x="3165158" y="3178492"/>
+              <a:off x="3069908" y="3178492"/>
               <a:ext cx="146685" cy="125730"/>
             </a:xfrm>
             <a:custGeom>
@@ -16232,8 +16252,8 @@
           </p:nvSpPr>
           <p:spPr>
             <a:xfrm>
-              <a:off x="3238500" y="3304222"/>
-              <a:ext cx="1803082" cy="533400"/>
+              <a:off x="3333750" y="3304222"/>
+              <a:ext cx="1707832" cy="533400"/>
             </a:xfrm>
             <a:custGeom>
               <a:avLst/>
@@ -16242,12 +16262,12 @@
               <a:cxnLst/>
               <a:rect l="l" t="t" r="r" b="b"/>
               <a:pathLst>
-                <a:path w="1803082" h="533400">
+                <a:path w="1707832" h="533400">
                   <a:moveTo>
-                    <a:pt x="1803082" y="533400"/>
+                    <a:pt x="1707832" y="533400"/>
                   </a:moveTo>
                   <a:lnTo>
-                    <a:pt x="1803082" y="203835"/>
+                    <a:pt x="1707832" y="203835"/>
                   </a:lnTo>
                   <a:lnTo>
                     <a:pt x="0" y="203835"/>
@@ -16274,7 +16294,7 @@
           </p:nvSpPr>
           <p:spPr>
             <a:xfrm>
-              <a:off x="3165158" y="3178492"/>
+              <a:off x="3260408" y="3178492"/>
               <a:ext cx="146685" cy="125730"/>
             </a:xfrm>
             <a:custGeom>
@@ -17160,7 +17180,7 @@
           <p:spPr>
             <a:xfrm>
               <a:off x="7150418" y="3367088"/>
-              <a:ext cx="1803082" cy="470535"/>
+              <a:ext cx="1707832" cy="470535"/>
             </a:xfrm>
             <a:custGeom>
               <a:avLst/>
@@ -17169,7 +17189,7 @@
               <a:cxnLst/>
               <a:rect l="l" t="t" r="r" b="b"/>
               <a:pathLst>
-                <a:path w="1803082" h="470535">
+                <a:path w="1707832" h="470535">
                   <a:moveTo>
                     <a:pt x="0" y="470535"/>
                   </a:moveTo>
@@ -17177,10 +17197,10 @@
                     <a:pt x="0" y="172403"/>
                   </a:lnTo>
                   <a:lnTo>
-                    <a:pt x="1803082" y="172403"/>
+                    <a:pt x="1707832" y="172403"/>
                   </a:lnTo>
                   <a:lnTo>
-                    <a:pt x="1803082" y="0"/>
+                    <a:pt x="1707832" y="0"/>
                   </a:lnTo>
                 </a:path>
               </a:pathLst>
@@ -17204,7 +17224,7 @@
           </p:nvSpPr>
           <p:spPr>
             <a:xfrm>
-              <a:off x="8880158" y="3241358"/>
+              <a:off x="8784908" y="3241358"/>
               <a:ext cx="146685" cy="125730"/>
             </a:xfrm>
             <a:custGeom>
@@ -17246,8 +17266,8 @@
           </p:nvSpPr>
           <p:spPr>
             <a:xfrm>
-              <a:off x="8953500" y="3367088"/>
-              <a:ext cx="1803082" cy="470535"/>
+              <a:off x="9048750" y="3367088"/>
+              <a:ext cx="1707832" cy="470535"/>
             </a:xfrm>
             <a:custGeom>
               <a:avLst/>
@@ -17256,12 +17276,12 @@
               <a:cxnLst/>
               <a:rect l="l" t="t" r="r" b="b"/>
               <a:pathLst>
-                <a:path w="1803082" h="470535">
+                <a:path w="1707832" h="470535">
                   <a:moveTo>
-                    <a:pt x="1803082" y="470535"/>
+                    <a:pt x="1707832" y="470535"/>
                   </a:moveTo>
                   <a:lnTo>
-                    <a:pt x="1803082" y="172403"/>
+                    <a:pt x="1707832" y="172403"/>
                   </a:lnTo>
                   <a:lnTo>
                     <a:pt x="0" y="172403"/>
@@ -17291,7 +17311,7 @@
           </p:nvSpPr>
           <p:spPr>
             <a:xfrm>
-              <a:off x="8880158" y="3241358"/>
+              <a:off x="8975408" y="3241358"/>
               <a:ext cx="146685" cy="125730"/>
             </a:xfrm>
             <a:custGeom>
@@ -44500,47 +44520,7 @@
           <p:spPr>
             <a:xfrm>
               <a:off x="525780" y="1548765"/>
-              <a:ext cx="1991125" cy="293370"/>
-            </a:xfrm>
-            <a:prstGeom prst="rect">
-              <a:avLst/>
-            </a:prstGeom>
-            <a:noFill/>
-            <a:ln>
-              <a:noFill/>
-            </a:ln>
-          </p:spPr>
-          <p:txBody>
-            <a:bodyPr wrap="none" lIns="0" tIns="0" rIns="0" bIns="0" anchor="t" anchorCtr="0">
-              <a:spAutoFit/>
-            </a:bodyPr>
-            <a:lstStyle/>
-            <a:p>
-              <a:pPr algn="l"/>
-              <a:r>
-                <a:rPr lang="zh-CN" sz="1500" b="1" dirty="0">
-                  <a:solidFill>
-                    <a:srgbClr val="5B3FA0"/>
-                  </a:solidFill>
-                  <a:latin typeface="+mn-lt"/>
-                  <a:ea typeface="+mn-ea"/>
-                  <a:cs typeface="+mn-cs"/>
-                </a:rPr>
-                <a:t>模板方法（第 39 讲）</a:t>
-              </a:r>
-            </a:p>
-          </p:txBody>
-        </p:sp>
-        <p:sp>
-          <p:nvSpPr>
-            <p:cNvPr id="8" name="TextBox 8"/>
-            <p:cNvSpPr txBox="1"/>
-            <p:nvPr/>
-          </p:nvSpPr>
-          <p:spPr>
-            <a:xfrm>
-              <a:off x="2913698" y="1548765"/>
-              <a:ext cx="3063240" cy="1139190"/>
+              <a:ext cx="1438275" cy="575310"/>
             </a:xfrm>
             <a:prstGeom prst="rect">
               <a:avLst/>
@@ -44562,104 +44542,18 @@
                 </a:lnSpc>
               </a:pPr>
               <a:r>
-                <a:rPr lang="zh-CN" sz="1500" dirty="0">
-                  <a:solidFill>
-                    <a:srgbClr val="1F2937"/>
-                  </a:solidFill>
-                  <a:latin typeface="+mn-lt"/>
-                  <a:ea typeface="+mn-ea"/>
-                  <a:cs typeface="+mn-cs"/>
-                </a:rPr>
-                <a:t>createAndUse() 是模板，</a:t>
+                <a:rPr lang="zh-CN" sz="1500" b="1" dirty="0">
+                  <a:solidFill>
+                    <a:srgbClr val="5B3FA0"/>
+                  </a:solidFill>
+                  <a:latin typeface="+mn-lt"/>
+                  <a:ea typeface="+mn-ea"/>
+                  <a:cs typeface="+mn-cs"/>
+                </a:rPr>
+                <a:t>模板方法（第 39</a:t>
               </a:r>
               <a:br/>
               <a:r>
-                <a:rPr lang="zh-CN" sz="1500" dirty="0">
-                  <a:solidFill>
-                    <a:srgbClr val="1F2937"/>
-                  </a:solidFill>
-                  <a:latin typeface="+mn-lt"/>
-                  <a:ea typeface="+mn-ea"/>
-                  <a:cs typeface="+mn-cs"/>
-                </a:rPr>
-                <a:t>createAnimal() 是其中被子类填的</a:t>
-              </a:r>
-              <a:br/>
-              <a:r>
-                <a:rPr lang="zh-CN" sz="1500" dirty="0">
-                  <a:solidFill>
-                    <a:srgbClr val="1F2937"/>
-                  </a:solidFill>
-                  <a:latin typeface="+mn-lt"/>
-                  <a:ea typeface="+mn-ea"/>
-                  <a:cs typeface="+mn-cs"/>
-                </a:rPr>
-                <a:t>一步，工厂方法常以模板方法里的钩</a:t>
-              </a:r>
-              <a:br/>
-              <a:r>
-                <a:rPr lang="zh-CN" sz="1500" dirty="0">
-                  <a:solidFill>
-                    <a:srgbClr val="1F2937"/>
-                  </a:solidFill>
-                  <a:latin typeface="+mn-lt"/>
-                  <a:ea typeface="+mn-ea"/>
-                  <a:cs typeface="+mn-cs"/>
-                </a:rPr>
-                <a:t>子出现</a:t>
-              </a:r>
-            </a:p>
-          </p:txBody>
-        </p:sp>
-        <p:sp>
-          <p:nvSpPr>
-            <p:cNvPr id="9" name="Rectangle 9"/>
-            <p:cNvSpPr/>
-            <p:nvPr/>
-          </p:nvSpPr>
-          <p:spPr>
-            <a:xfrm>
-              <a:off x="533400" y="2714625"/>
-              <a:ext cx="5626418" cy="9525"/>
-            </a:xfrm>
-            <a:prstGeom prst="rect">
-              <a:avLst/>
-            </a:prstGeom>
-            <a:solidFill>
-              <a:srgbClr val="D9DFEA"/>
-            </a:solidFill>
-            <a:ln>
-              <a:noFill/>
-            </a:ln>
-          </p:spPr>
-        </p:sp>
-        <p:sp>
-          <p:nvSpPr>
-            <p:cNvPr id="10" name="TextBox 10"/>
-            <p:cNvSpPr txBox="1"/>
-            <p:nvPr/>
-          </p:nvSpPr>
-          <p:spPr>
-            <a:xfrm>
-              <a:off x="525780" y="2834640"/>
-              <a:ext cx="1991125" cy="293370"/>
-            </a:xfrm>
-            <a:prstGeom prst="rect">
-              <a:avLst/>
-            </a:prstGeom>
-            <a:noFill/>
-            <a:ln>
-              <a:noFill/>
-            </a:ln>
-          </p:spPr>
-          <p:txBody>
-            <a:bodyPr wrap="none" lIns="0" tIns="0" rIns="0" bIns="0" anchor="t" anchorCtr="0">
-              <a:spAutoFit/>
-            </a:bodyPr>
-            <a:lstStyle/>
-            <a:p>
-              <a:pPr algn="l"/>
-              <a:r>
                 <a:rPr lang="zh-CN" sz="1500" b="1" dirty="0">
                   <a:solidFill>
                     <a:srgbClr val="5B3FA0"/>
@@ -44668,123 +44562,21 @@
                   <a:ea typeface="+mn-ea"/>
                   <a:cs typeface="+mn-cs"/>
                 </a:rPr>
-                <a:t>原型模式（第 14 讲）</a:t>
-              </a:r>
-            </a:p>
-          </p:txBody>
-        </p:sp>
-        <p:sp>
-          <p:nvSpPr>
-            <p:cNvPr id="11" name="TextBox 11"/>
-            <p:cNvSpPr txBox="1"/>
-            <p:nvPr/>
-          </p:nvSpPr>
-          <p:spPr>
-            <a:xfrm>
-              <a:off x="2913698" y="2834640"/>
-              <a:ext cx="3084576" cy="293370"/>
-            </a:xfrm>
-            <a:prstGeom prst="rect">
-              <a:avLst/>
-            </a:prstGeom>
-            <a:noFill/>
-            <a:ln>
-              <a:noFill/>
-            </a:ln>
-          </p:spPr>
-          <p:txBody>
-            <a:bodyPr wrap="none" lIns="0" tIns="0" rIns="0" bIns="0" anchor="t" anchorCtr="0">
-              <a:spAutoFit/>
-            </a:bodyPr>
-            <a:lstStyle/>
-            <a:p>
-              <a:pPr algn="l"/>
-              <a:r>
-                <a:rPr lang="zh-CN" sz="1500" dirty="0">
-                  <a:solidFill>
-                    <a:srgbClr val="1F2937"/>
-                  </a:solidFill>
-                  <a:latin typeface="+mn-lt"/>
-                  <a:ea typeface="+mn-ea"/>
-                  <a:cs typeface="+mn-cs"/>
-                </a:rPr>
-                <a:t>避开具体类名靠 clone() 复制样板</a:t>
-              </a:r>
-            </a:p>
-          </p:txBody>
-        </p:sp>
-        <p:sp>
-          <p:nvSpPr>
-            <p:cNvPr id="12" name="Rectangle 12"/>
-            <p:cNvSpPr/>
-            <p:nvPr/>
-          </p:nvSpPr>
-          <p:spPr>
-            <a:xfrm>
-              <a:off x="533400" y="3154680"/>
-              <a:ext cx="5626418" cy="9525"/>
-            </a:xfrm>
-            <a:prstGeom prst="rect">
-              <a:avLst/>
-            </a:prstGeom>
-            <a:solidFill>
-              <a:srgbClr val="D9DFEA"/>
-            </a:solidFill>
-            <a:ln>
-              <a:noFill/>
-            </a:ln>
-          </p:spPr>
-        </p:sp>
-        <p:sp>
-          <p:nvSpPr>
-            <p:cNvPr id="13" name="TextBox 13"/>
-            <p:cNvSpPr txBox="1"/>
-            <p:nvPr/>
-          </p:nvSpPr>
-          <p:spPr>
-            <a:xfrm>
-              <a:off x="525780" y="3274695"/>
-              <a:ext cx="2193055" cy="293370"/>
-            </a:xfrm>
-            <a:prstGeom prst="rect">
-              <a:avLst/>
-            </a:prstGeom>
-            <a:noFill/>
-            <a:ln>
-              <a:noFill/>
-            </a:ln>
-          </p:spPr>
-          <p:txBody>
-            <a:bodyPr wrap="none" lIns="0" tIns="0" rIns="0" bIns="0" anchor="t" anchorCtr="0">
-              <a:spAutoFit/>
-            </a:bodyPr>
-            <a:lstStyle/>
-            <a:p>
-              <a:pPr algn="l"/>
-              <a:r>
-                <a:rPr lang="zh-CN" sz="1500" b="1" dirty="0">
-                  <a:solidFill>
-                    <a:srgbClr val="5B3FA0"/>
-                  </a:solidFill>
-                  <a:latin typeface="+mn-lt"/>
-                  <a:ea typeface="+mn-ea"/>
-                  <a:cs typeface="+mn-cs"/>
-                </a:rPr>
-                <a:t>建造者模式（第 13 讲）</a:t>
-              </a:r>
-            </a:p>
-          </p:txBody>
-        </p:sp>
-        <p:sp>
-          <p:nvSpPr>
-            <p:cNvPr id="14" name="TextBox 14"/>
-            <p:cNvSpPr txBox="1"/>
-            <p:nvPr/>
-          </p:nvSpPr>
-          <p:spPr>
-            <a:xfrm>
-              <a:off x="2913698" y="3274695"/>
-              <a:ext cx="3063240" cy="575310"/>
+                <a:t>讲）</a:t>
+              </a:r>
+            </a:p>
+          </p:txBody>
+        </p:sp>
+        <p:sp>
+          <p:nvSpPr>
+            <p:cNvPr id="8" name="TextBox 8"/>
+            <p:cNvSpPr txBox="1"/>
+            <p:nvPr/>
+          </p:nvSpPr>
+          <p:spPr>
+            <a:xfrm>
+              <a:off x="2326005" y="1548765"/>
+              <a:ext cx="3577590" cy="857250"/>
             </a:xfrm>
             <a:prstGeom prst="rect">
               <a:avLst/>
@@ -44814,7 +44606,7 @@
                   <a:ea typeface="+mn-ea"/>
                   <a:cs typeface="+mn-cs"/>
                 </a:rPr>
-                <a:t>管的是分步骤装配一个复杂对象，工</a:t>
+                <a:t>createAndUse() 是模板，</a:t>
               </a:r>
               <a:br/>
               <a:r>
@@ -44826,20 +44618,32 @@
                   <a:ea typeface="+mn-ea"/>
                   <a:cs typeface="+mn-cs"/>
                 </a:rPr>
-                <a:t>厂方法只管造哪一个</a:t>
-              </a:r>
-            </a:p>
-          </p:txBody>
-        </p:sp>
-        <p:sp>
-          <p:nvSpPr>
-            <p:cNvPr id="15" name="Rectangle 15"/>
+                <a:t>createAnimal() 是其中被子类填的一步，</a:t>
+              </a:r>
+              <a:br/>
+              <a:r>
+                <a:rPr lang="zh-CN" sz="1500" dirty="0">
+                  <a:solidFill>
+                    <a:srgbClr val="1F2937"/>
+                  </a:solidFill>
+                  <a:latin typeface="+mn-lt"/>
+                  <a:ea typeface="+mn-ea"/>
+                  <a:cs typeface="+mn-cs"/>
+                </a:rPr>
+                <a:t>工厂方法常以模板方法里的钩子出现</a:t>
+              </a:r>
+            </a:p>
+          </p:txBody>
+        </p:sp>
+        <p:sp>
+          <p:nvSpPr>
+            <p:cNvPr id="9" name="Rectangle 9"/>
             <p:cNvSpPr/>
             <p:nvPr/>
           </p:nvSpPr>
           <p:spPr>
             <a:xfrm>
-              <a:off x="533400" y="3876675"/>
+              <a:off x="533400" y="2432685"/>
               <a:ext cx="5626418" cy="9525"/>
             </a:xfrm>
             <a:prstGeom prst="rect">
@@ -44855,54 +44659,14 @@
         </p:sp>
         <p:sp>
           <p:nvSpPr>
-            <p:cNvPr id="16" name="TextBox 16"/>
-            <p:cNvSpPr txBox="1"/>
-            <p:nvPr/>
-          </p:nvSpPr>
-          <p:spPr>
-            <a:xfrm>
-              <a:off x="525780" y="3996690"/>
-              <a:ext cx="1991125" cy="293370"/>
-            </a:xfrm>
-            <a:prstGeom prst="rect">
-              <a:avLst/>
-            </a:prstGeom>
-            <a:noFill/>
-            <a:ln>
-              <a:noFill/>
-            </a:ln>
-          </p:spPr>
-          <p:txBody>
-            <a:bodyPr wrap="none" lIns="0" tIns="0" rIns="0" bIns="0" anchor="t" anchorCtr="0">
-              <a:spAutoFit/>
-            </a:bodyPr>
-            <a:lstStyle/>
-            <a:p>
-              <a:pPr algn="l"/>
-              <a:r>
-                <a:rPr lang="zh-CN" sz="1500" b="1" dirty="0">
-                  <a:solidFill>
-                    <a:srgbClr val="5B3FA0"/>
-                  </a:solidFill>
-                  <a:latin typeface="+mn-lt"/>
-                  <a:ea typeface="+mn-ea"/>
-                  <a:cs typeface="+mn-cs"/>
-                </a:rPr>
-                <a:t>单例模式（第 15 讲）</a:t>
-              </a:r>
-            </a:p>
-          </p:txBody>
-        </p:sp>
-        <p:sp>
-          <p:nvSpPr>
-            <p:cNvPr id="17" name="TextBox 17"/>
-            <p:cNvSpPr txBox="1"/>
-            <p:nvPr/>
-          </p:nvSpPr>
-          <p:spPr>
-            <a:xfrm>
-              <a:off x="2913698" y="3996690"/>
-              <a:ext cx="3063240" cy="575310"/>
+            <p:cNvPr id="10" name="TextBox 10"/>
+            <p:cNvSpPr txBox="1"/>
+            <p:nvPr/>
+          </p:nvSpPr>
+          <p:spPr>
+            <a:xfrm>
+              <a:off x="525780" y="2552700"/>
+              <a:ext cx="1438275" cy="575310"/>
             </a:xfrm>
             <a:prstGeom prst="rect">
               <a:avLst/>
@@ -44924,6 +44688,58 @@
                 </a:lnSpc>
               </a:pPr>
               <a:r>
+                <a:rPr lang="zh-CN" sz="1500" b="1" dirty="0">
+                  <a:solidFill>
+                    <a:srgbClr val="5B3FA0"/>
+                  </a:solidFill>
+                  <a:latin typeface="+mn-lt"/>
+                  <a:ea typeface="+mn-ea"/>
+                  <a:cs typeface="+mn-cs"/>
+                </a:rPr>
+                <a:t>原型模式（第 14</a:t>
+              </a:r>
+              <a:br/>
+              <a:r>
+                <a:rPr lang="zh-CN" sz="1500" b="1" dirty="0">
+                  <a:solidFill>
+                    <a:srgbClr val="5B3FA0"/>
+                  </a:solidFill>
+                  <a:latin typeface="+mn-lt"/>
+                  <a:ea typeface="+mn-ea"/>
+                  <a:cs typeface="+mn-cs"/>
+                </a:rPr>
+                <a:t>讲）</a:t>
+              </a:r>
+            </a:p>
+          </p:txBody>
+        </p:sp>
+        <p:sp>
+          <p:nvSpPr>
+            <p:cNvPr id="11" name="TextBox 11"/>
+            <p:cNvSpPr txBox="1"/>
+            <p:nvPr/>
+          </p:nvSpPr>
+          <p:spPr>
+            <a:xfrm>
+              <a:off x="2326005" y="2552700"/>
+              <a:ext cx="3084576" cy="293370"/>
+            </a:xfrm>
+            <a:prstGeom prst="rect">
+              <a:avLst/>
+            </a:prstGeom>
+            <a:noFill/>
+            <a:ln>
+              <a:noFill/>
+            </a:ln>
+          </p:spPr>
+          <p:txBody>
+            <a:bodyPr wrap="none" lIns="0" tIns="0" rIns="0" bIns="0" anchor="t" anchorCtr="0">
+              <a:spAutoFit/>
+            </a:bodyPr>
+            <a:lstStyle/>
+            <a:p>
+              <a:pPr algn="l"/>
+              <a:r>
                 <a:rPr lang="zh-CN" sz="1500" dirty="0">
                   <a:solidFill>
                     <a:srgbClr val="1F2937"/>
@@ -44932,32 +44748,20 @@
                   <a:ea typeface="+mn-ea"/>
                   <a:cs typeface="+mn-cs"/>
                 </a:rPr>
-                <a:t>具体工厂通常没有状态，做成单例可</a:t>
-              </a:r>
-              <a:br/>
-              <a:r>
-                <a:rPr lang="zh-CN" sz="1500" dirty="0">
-                  <a:solidFill>
-                    <a:srgbClr val="1F2937"/>
-                  </a:solidFill>
-                  <a:latin typeface="+mn-lt"/>
-                  <a:ea typeface="+mn-ea"/>
-                  <a:cs typeface="+mn-cs"/>
-                </a:rPr>
-                <a:t>以省掉反复创建</a:t>
-              </a:r>
-            </a:p>
-          </p:txBody>
-        </p:sp>
-        <p:sp>
-          <p:nvSpPr>
-            <p:cNvPr id="18" name="Rectangle 18"/>
+                <a:t>避开具体类名靠 clone() 复制样板</a:t>
+              </a:r>
+            </a:p>
+          </p:txBody>
+        </p:sp>
+        <p:sp>
+          <p:nvSpPr>
+            <p:cNvPr id="12" name="Rectangle 12"/>
             <p:cNvSpPr/>
             <p:nvPr/>
           </p:nvSpPr>
           <p:spPr>
             <a:xfrm>
-              <a:off x="533400" y="4598670"/>
+              <a:off x="533400" y="3154680"/>
               <a:ext cx="5626418" cy="9525"/>
             </a:xfrm>
             <a:prstGeom prst="rect">
@@ -44973,54 +44777,14 @@
         </p:sp>
         <p:sp>
           <p:nvSpPr>
-            <p:cNvPr id="19" name="TextBox 19"/>
-            <p:cNvSpPr txBox="1"/>
-            <p:nvPr/>
-          </p:nvSpPr>
-          <p:spPr>
-            <a:xfrm>
-              <a:off x="525780" y="4718685"/>
-              <a:ext cx="1991125" cy="293370"/>
-            </a:xfrm>
-            <a:prstGeom prst="rect">
-              <a:avLst/>
-            </a:prstGeom>
-            <a:noFill/>
-            <a:ln>
-              <a:noFill/>
-            </a:ln>
-          </p:spPr>
-          <p:txBody>
-            <a:bodyPr wrap="none" lIns="0" tIns="0" rIns="0" bIns="0" anchor="t" anchorCtr="0">
-              <a:spAutoFit/>
-            </a:bodyPr>
-            <a:lstStyle/>
-            <a:p>
-              <a:pPr algn="l"/>
-              <a:r>
-                <a:rPr lang="zh-CN" sz="1500" b="1" dirty="0">
-                  <a:solidFill>
-                    <a:srgbClr val="5B3FA0"/>
-                  </a:solidFill>
-                  <a:latin typeface="+mn-lt"/>
-                  <a:ea typeface="+mn-ea"/>
-                  <a:cs typeface="+mn-cs"/>
-                </a:rPr>
-                <a:t>抽象工厂（第 12 讲）</a:t>
-              </a:r>
-            </a:p>
-          </p:txBody>
-        </p:sp>
-        <p:sp>
-          <p:nvSpPr>
-            <p:cNvPr id="20" name="TextBox 20"/>
-            <p:cNvSpPr txBox="1"/>
-            <p:nvPr/>
-          </p:nvSpPr>
-          <p:spPr>
-            <a:xfrm>
-              <a:off x="2913698" y="4718685"/>
-              <a:ext cx="3063240" cy="575310"/>
+            <p:cNvPr id="13" name="TextBox 13"/>
+            <p:cNvSpPr txBox="1"/>
+            <p:nvPr/>
+          </p:nvSpPr>
+          <p:spPr>
+            <a:xfrm>
+              <a:off x="525780" y="3274695"/>
+              <a:ext cx="1348740" cy="575310"/>
             </a:xfrm>
             <a:prstGeom prst="rect">
               <a:avLst/>
@@ -45042,6 +44806,62 @@
                 </a:lnSpc>
               </a:pPr>
               <a:r>
+                <a:rPr lang="zh-CN" sz="1500" b="1" dirty="0">
+                  <a:solidFill>
+                    <a:srgbClr val="5B3FA0"/>
+                  </a:solidFill>
+                  <a:latin typeface="+mn-lt"/>
+                  <a:ea typeface="+mn-ea"/>
+                  <a:cs typeface="+mn-cs"/>
+                </a:rPr>
+                <a:t>建造者模式（第</a:t>
+              </a:r>
+              <a:br/>
+              <a:r>
+                <a:rPr lang="zh-CN" sz="1500" b="1" dirty="0">
+                  <a:solidFill>
+                    <a:srgbClr val="5B3FA0"/>
+                  </a:solidFill>
+                  <a:latin typeface="+mn-lt"/>
+                  <a:ea typeface="+mn-ea"/>
+                  <a:cs typeface="+mn-cs"/>
+                </a:rPr>
+                <a:t>13 讲）</a:t>
+              </a:r>
+            </a:p>
+          </p:txBody>
+        </p:sp>
+        <p:sp>
+          <p:nvSpPr>
+            <p:cNvPr id="14" name="TextBox 14"/>
+            <p:cNvSpPr txBox="1"/>
+            <p:nvPr/>
+          </p:nvSpPr>
+          <p:spPr>
+            <a:xfrm>
+              <a:off x="2326005" y="3274695"/>
+              <a:ext cx="3444240" cy="575310"/>
+            </a:xfrm>
+            <a:prstGeom prst="rect">
+              <a:avLst/>
+            </a:prstGeom>
+            <a:noFill/>
+            <a:ln>
+              <a:noFill/>
+            </a:ln>
+          </p:spPr>
+          <p:txBody>
+            <a:bodyPr wrap="none" lIns="0" tIns="0" rIns="0" bIns="0" anchor="t" anchorCtr="0">
+              <a:spAutoFit/>
+            </a:bodyPr>
+            <a:lstStyle/>
+            <a:p>
+              <a:pPr algn="l">
+                <a:lnSpc>
+                  <a:spcPts val="2220"/>
+                </a:lnSpc>
+              </a:pPr>
+              <a:r>
                 <a:rPr lang="zh-CN" sz="1500" dirty="0">
                   <a:solidFill>
                     <a:srgbClr val="1F2937"/>
@@ -45050,7 +44870,7 @@
                   <a:ea typeface="+mn-ea"/>
                   <a:cs typeface="+mn-cs"/>
                 </a:rPr>
-                <a:t>一个工厂里放一组工厂方法，负责一</a:t>
+                <a:t>管的是分步骤装配一个复杂对象，工厂方</a:t>
               </a:r>
               <a:br/>
               <a:r>
@@ -45062,7 +44882,275 @@
                   <a:ea typeface="+mn-ea"/>
                   <a:cs typeface="+mn-cs"/>
                 </a:rPr>
-                <a:t>整族配套产品</a:t>
+                <a:t>法只管造哪一个</a:t>
+              </a:r>
+            </a:p>
+          </p:txBody>
+        </p:sp>
+        <p:sp>
+          <p:nvSpPr>
+            <p:cNvPr id="15" name="Rectangle 15"/>
+            <p:cNvSpPr/>
+            <p:nvPr/>
+          </p:nvSpPr>
+          <p:spPr>
+            <a:xfrm>
+              <a:off x="533400" y="3876675"/>
+              <a:ext cx="5626418" cy="9525"/>
+            </a:xfrm>
+            <a:prstGeom prst="rect">
+              <a:avLst/>
+            </a:prstGeom>
+            <a:solidFill>
+              <a:srgbClr val="D9DFEA"/>
+            </a:solidFill>
+            <a:ln>
+              <a:noFill/>
+            </a:ln>
+          </p:spPr>
+        </p:sp>
+        <p:sp>
+          <p:nvSpPr>
+            <p:cNvPr id="16" name="TextBox 16"/>
+            <p:cNvSpPr txBox="1"/>
+            <p:nvPr/>
+          </p:nvSpPr>
+          <p:spPr>
+            <a:xfrm>
+              <a:off x="525780" y="3996690"/>
+              <a:ext cx="1438275" cy="575310"/>
+            </a:xfrm>
+            <a:prstGeom prst="rect">
+              <a:avLst/>
+            </a:prstGeom>
+            <a:noFill/>
+            <a:ln>
+              <a:noFill/>
+            </a:ln>
+          </p:spPr>
+          <p:txBody>
+            <a:bodyPr wrap="none" lIns="0" tIns="0" rIns="0" bIns="0" anchor="t" anchorCtr="0">
+              <a:spAutoFit/>
+            </a:bodyPr>
+            <a:lstStyle/>
+            <a:p>
+              <a:pPr algn="l">
+                <a:lnSpc>
+                  <a:spcPts val="2220"/>
+                </a:lnSpc>
+              </a:pPr>
+              <a:r>
+                <a:rPr lang="zh-CN" sz="1500" b="1" dirty="0">
+                  <a:solidFill>
+                    <a:srgbClr val="5B3FA0"/>
+                  </a:solidFill>
+                  <a:latin typeface="+mn-lt"/>
+                  <a:ea typeface="+mn-ea"/>
+                  <a:cs typeface="+mn-cs"/>
+                </a:rPr>
+                <a:t>单例模式（第 15</a:t>
+              </a:r>
+              <a:br/>
+              <a:r>
+                <a:rPr lang="zh-CN" sz="1500" b="1" dirty="0">
+                  <a:solidFill>
+                    <a:srgbClr val="5B3FA0"/>
+                  </a:solidFill>
+                  <a:latin typeface="+mn-lt"/>
+                  <a:ea typeface="+mn-ea"/>
+                  <a:cs typeface="+mn-cs"/>
+                </a:rPr>
+                <a:t>讲）</a:t>
+              </a:r>
+            </a:p>
+          </p:txBody>
+        </p:sp>
+        <p:sp>
+          <p:nvSpPr>
+            <p:cNvPr id="17" name="TextBox 17"/>
+            <p:cNvSpPr txBox="1"/>
+            <p:nvPr/>
+          </p:nvSpPr>
+          <p:spPr>
+            <a:xfrm>
+              <a:off x="2326005" y="3996690"/>
+              <a:ext cx="3444240" cy="575310"/>
+            </a:xfrm>
+            <a:prstGeom prst="rect">
+              <a:avLst/>
+            </a:prstGeom>
+            <a:noFill/>
+            <a:ln>
+              <a:noFill/>
+            </a:ln>
+          </p:spPr>
+          <p:txBody>
+            <a:bodyPr wrap="none" lIns="0" tIns="0" rIns="0" bIns="0" anchor="t" anchorCtr="0">
+              <a:spAutoFit/>
+            </a:bodyPr>
+            <a:lstStyle/>
+            <a:p>
+              <a:pPr algn="l">
+                <a:lnSpc>
+                  <a:spcPts val="2220"/>
+                </a:lnSpc>
+              </a:pPr>
+              <a:r>
+                <a:rPr lang="zh-CN" sz="1500" dirty="0">
+                  <a:solidFill>
+                    <a:srgbClr val="1F2937"/>
+                  </a:solidFill>
+                  <a:latin typeface="+mn-lt"/>
+                  <a:ea typeface="+mn-ea"/>
+                  <a:cs typeface="+mn-cs"/>
+                </a:rPr>
+                <a:t>具体工厂通常没有状态，做成单例可以省</a:t>
+              </a:r>
+              <a:br/>
+              <a:r>
+                <a:rPr lang="zh-CN" sz="1500" dirty="0">
+                  <a:solidFill>
+                    <a:srgbClr val="1F2937"/>
+                  </a:solidFill>
+                  <a:latin typeface="+mn-lt"/>
+                  <a:ea typeface="+mn-ea"/>
+                  <a:cs typeface="+mn-cs"/>
+                </a:rPr>
+                <a:t>掉反复创建</a:t>
+              </a:r>
+            </a:p>
+          </p:txBody>
+        </p:sp>
+        <p:sp>
+          <p:nvSpPr>
+            <p:cNvPr id="18" name="Rectangle 18"/>
+            <p:cNvSpPr/>
+            <p:nvPr/>
+          </p:nvSpPr>
+          <p:spPr>
+            <a:xfrm>
+              <a:off x="533400" y="4598670"/>
+              <a:ext cx="5626418" cy="9525"/>
+            </a:xfrm>
+            <a:prstGeom prst="rect">
+              <a:avLst/>
+            </a:prstGeom>
+            <a:solidFill>
+              <a:srgbClr val="D9DFEA"/>
+            </a:solidFill>
+            <a:ln>
+              <a:noFill/>
+            </a:ln>
+          </p:spPr>
+        </p:sp>
+        <p:sp>
+          <p:nvSpPr>
+            <p:cNvPr id="19" name="TextBox 19"/>
+            <p:cNvSpPr txBox="1"/>
+            <p:nvPr/>
+          </p:nvSpPr>
+          <p:spPr>
+            <a:xfrm>
+              <a:off x="525780" y="4718685"/>
+              <a:ext cx="1438275" cy="575310"/>
+            </a:xfrm>
+            <a:prstGeom prst="rect">
+              <a:avLst/>
+            </a:prstGeom>
+            <a:noFill/>
+            <a:ln>
+              <a:noFill/>
+            </a:ln>
+          </p:spPr>
+          <p:txBody>
+            <a:bodyPr wrap="none" lIns="0" tIns="0" rIns="0" bIns="0" anchor="t" anchorCtr="0">
+              <a:spAutoFit/>
+            </a:bodyPr>
+            <a:lstStyle/>
+            <a:p>
+              <a:pPr algn="l">
+                <a:lnSpc>
+                  <a:spcPts val="2220"/>
+                </a:lnSpc>
+              </a:pPr>
+              <a:r>
+                <a:rPr lang="zh-CN" sz="1500" b="1" dirty="0">
+                  <a:solidFill>
+                    <a:srgbClr val="5B3FA0"/>
+                  </a:solidFill>
+                  <a:latin typeface="+mn-lt"/>
+                  <a:ea typeface="+mn-ea"/>
+                  <a:cs typeface="+mn-cs"/>
+                </a:rPr>
+                <a:t>抽象工厂（第 12</a:t>
+              </a:r>
+              <a:br/>
+              <a:r>
+                <a:rPr lang="zh-CN" sz="1500" b="1" dirty="0">
+                  <a:solidFill>
+                    <a:srgbClr val="5B3FA0"/>
+                  </a:solidFill>
+                  <a:latin typeface="+mn-lt"/>
+                  <a:ea typeface="+mn-ea"/>
+                  <a:cs typeface="+mn-cs"/>
+                </a:rPr>
+                <a:t>讲）</a:t>
+              </a:r>
+            </a:p>
+          </p:txBody>
+        </p:sp>
+        <p:sp>
+          <p:nvSpPr>
+            <p:cNvPr id="20" name="TextBox 20"/>
+            <p:cNvSpPr txBox="1"/>
+            <p:nvPr/>
+          </p:nvSpPr>
+          <p:spPr>
+            <a:xfrm>
+              <a:off x="2326005" y="4718685"/>
+              <a:ext cx="3444240" cy="575310"/>
+            </a:xfrm>
+            <a:prstGeom prst="rect">
+              <a:avLst/>
+            </a:prstGeom>
+            <a:noFill/>
+            <a:ln>
+              <a:noFill/>
+            </a:ln>
+          </p:spPr>
+          <p:txBody>
+            <a:bodyPr wrap="none" lIns="0" tIns="0" rIns="0" bIns="0" anchor="t" anchorCtr="0">
+              <a:spAutoFit/>
+            </a:bodyPr>
+            <a:lstStyle/>
+            <a:p>
+              <a:pPr algn="l">
+                <a:lnSpc>
+                  <a:spcPts val="2220"/>
+                </a:lnSpc>
+              </a:pPr>
+              <a:r>
+                <a:rPr lang="zh-CN" sz="1500" dirty="0">
+                  <a:solidFill>
+                    <a:srgbClr val="1F2937"/>
+                  </a:solidFill>
+                  <a:latin typeface="+mn-lt"/>
+                  <a:ea typeface="+mn-ea"/>
+                  <a:cs typeface="+mn-cs"/>
+                </a:rPr>
+                <a:t>一个工厂里放一组工厂方法，负责一整族</a:t>
+              </a:r>
+              <a:br/>
+              <a:r>
+                <a:rPr lang="zh-CN" sz="1500" dirty="0">
+                  <a:solidFill>
+                    <a:srgbClr val="1F2937"/>
+                  </a:solidFill>
+                  <a:latin typeface="+mn-lt"/>
+                  <a:ea typeface="+mn-ea"/>
+                  <a:cs typeface="+mn-cs"/>
+                </a:rPr>
+                <a:t>配套产品</a:t>
               </a:r>
             </a:p>
           </p:txBody>
@@ -51217,9 +51305,9 @@
         <p:grpSpPr>
           <a:xfrm>
             <a:off x="533400" y="5177790"/>
-            <a:ext cx="11125200" cy="481012"/>
+            <a:ext cx="11125200" cy="533400"/>
             <a:chOff x="533400" y="5177790"/>
-            <a:chExt cx="11125200" cy="481012"/>
+            <a:chExt cx="11125200" cy="533400"/>
           </a:xfrm>
         </p:grpSpPr>
         <p:sp>
@@ -51231,11 +51319,11 @@
           <p:spPr>
             <a:xfrm>
               <a:off x="533400" y="5177790"/>
-              <a:ext cx="11125200" cy="481012"/>
+              <a:ext cx="11125200" cy="533400"/>
             </a:xfrm>
             <a:prstGeom prst="roundRect">
               <a:avLst>
-                <a:gd name="adj" fmla="val 23762"/>
+                <a:gd name="adj" fmla="val 21429"/>
               </a:avLst>
             </a:prstGeom>
             <a:solidFill>
@@ -51254,9 +51342,9 @@
           </p:nvGrpSpPr>
           <p:grpSpPr>
             <a:xfrm>
-              <a:off x="738188" y="5317808"/>
+              <a:off x="738188" y="5343525"/>
               <a:ext cx="200026" cy="200025"/>
-              <a:chOff x="738188" y="5317808"/>
+              <a:chOff x="738188" y="5343525"/>
               <a:chExt cx="200026" cy="200025"/>
             </a:xfrm>
           </p:grpSpPr>
@@ -51268,7 +51356,7 @@
             </p:nvSpPr>
             <p:spPr>
               <a:xfrm>
-                <a:off x="738188" y="5317808"/>
+                <a:off x="738188" y="5343525"/>
                 <a:ext cx="200026" cy="100013"/>
               </a:xfrm>
               <a:custGeom>
@@ -51328,7 +51416,7 @@
             </p:nvSpPr>
             <p:spPr>
               <a:xfrm>
-                <a:off x="777926" y="5362258"/>
+                <a:off x="777926" y="5387975"/>
                 <a:ext cx="120548" cy="155575"/>
               </a:xfrm>
               <a:custGeom>
@@ -51401,7 +51489,7 @@
             </p:nvSpPr>
             <p:spPr>
               <a:xfrm>
-                <a:off x="812642" y="5473383"/>
+                <a:off x="812642" y="5499101"/>
                 <a:ext cx="51118" cy="9525"/>
               </a:xfrm>
               <a:custGeom>
@@ -51438,7 +51526,7 @@
           </p:nvSpPr>
           <p:spPr>
             <a:xfrm>
-              <a:off x="1040892" y="5323523"/>
+              <a:off x="1040892" y="5349240"/>
               <a:ext cx="6138253" cy="264033"/>
             </a:xfrm>
             <a:prstGeom prst="rect">
@@ -54577,16 +54665,16 @@
       </p:grpSp>
       <p:grpSp>
         <p:nvGrpSpPr>
-          <p:cNvPr id="36" name="c1-callout-2"/>
+          <p:cNvPr id="47" name="c1-table-2"/>
           <p:cNvGrpSpPr/>
           <p:nvPr/>
         </p:nvGrpSpPr>
         <p:grpSpPr>
           <a:xfrm>
             <a:off x="533400" y="3789998"/>
-            <a:ext cx="5193982" cy="467678"/>
+            <a:ext cx="5193982" cy="1143952"/>
             <a:chOff x="533400" y="3789998"/>
-            <a:chExt cx="5193982" cy="467678"/>
+            <a:chExt cx="5193982" cy="1143952"/>
           </a:xfrm>
         </p:grpSpPr>
         <p:sp>
@@ -54598,11 +54686,562 @@
           <p:spPr>
             <a:xfrm>
               <a:off x="533400" y="3789998"/>
-              <a:ext cx="5193982" cy="467678"/>
+              <a:ext cx="5193982" cy="381000"/>
+            </a:xfrm>
+            <a:prstGeom prst="rect">
+              <a:avLst/>
+            </a:prstGeom>
+            <a:solidFill>
+              <a:srgbClr val="5B3FA0"/>
+            </a:solidFill>
+            <a:ln>
+              <a:noFill/>
+            </a:ln>
+          </p:spPr>
+        </p:sp>
+        <p:sp>
+          <p:nvSpPr>
+            <p:cNvPr id="31" name="TextBox 31"/>
+            <p:cNvSpPr txBox="1"/>
+            <p:nvPr/>
+          </p:nvSpPr>
+          <p:spPr>
+            <a:xfrm>
+              <a:off x="1024509" y="3907155"/>
+              <a:ext cx="576072" cy="205359"/>
+            </a:xfrm>
+            <a:prstGeom prst="rect">
+              <a:avLst/>
+            </a:prstGeom>
+            <a:noFill/>
+            <a:ln>
+              <a:noFill/>
+            </a:ln>
+          </p:spPr>
+          <p:txBody>
+            <a:bodyPr wrap="none" lIns="0" tIns="0" rIns="0" bIns="0" anchor="t" anchorCtr="0">
+              <a:spAutoFit/>
+            </a:bodyPr>
+            <a:lstStyle/>
+            <a:p>
+              <a:pPr algn="ctr"/>
+              <a:r>
+                <a:rPr lang="zh-CN" sz="1050" b="1" dirty="0">
+                  <a:solidFill>
+                    <a:srgbClr val="FFFFFF"/>
+                  </a:solidFill>
+                  <a:latin typeface="+mn-lt"/>
+                  <a:ea typeface="+mn-ea"/>
+                  <a:cs typeface="+mn-cs"/>
+                </a:rPr>
+                <a:t>需求变化</a:t>
+              </a:r>
+            </a:p>
+          </p:txBody>
+        </p:sp>
+        <p:sp>
+          <p:nvSpPr>
+            <p:cNvPr id="32" name="TextBox 32"/>
+            <p:cNvSpPr txBox="1"/>
+            <p:nvPr/>
+          </p:nvSpPr>
+          <p:spPr>
+            <a:xfrm>
+              <a:off x="2686622" y="3907155"/>
+              <a:ext cx="576072" cy="205359"/>
+            </a:xfrm>
+            <a:prstGeom prst="rect">
+              <a:avLst/>
+            </a:prstGeom>
+            <a:noFill/>
+            <a:ln>
+              <a:noFill/>
+            </a:ln>
+          </p:spPr>
+          <p:txBody>
+            <a:bodyPr wrap="none" lIns="0" tIns="0" rIns="0" bIns="0" anchor="t" anchorCtr="0">
+              <a:spAutoFit/>
+            </a:bodyPr>
+            <a:lstStyle/>
+            <a:p>
+              <a:pPr algn="ctr"/>
+              <a:r>
+                <a:rPr lang="zh-CN" sz="1050" b="1" dirty="0">
+                  <a:solidFill>
+                    <a:srgbClr val="FFFFFF"/>
+                  </a:solidFill>
+                  <a:latin typeface="+mn-lt"/>
+                  <a:ea typeface="+mn-ea"/>
+                  <a:cs typeface="+mn-cs"/>
+                </a:rPr>
+                <a:t>抽出之前</a:t>
+              </a:r>
+            </a:p>
+          </p:txBody>
+        </p:sp>
+        <p:sp>
+          <p:nvSpPr>
+            <p:cNvPr id="33" name="TextBox 33"/>
+            <p:cNvSpPr txBox="1"/>
+            <p:nvPr/>
+          </p:nvSpPr>
+          <p:spPr>
+            <a:xfrm>
+              <a:off x="4503992" y="3907155"/>
+              <a:ext cx="576072" cy="205359"/>
+            </a:xfrm>
+            <a:prstGeom prst="rect">
+              <a:avLst/>
+            </a:prstGeom>
+            <a:noFill/>
+            <a:ln>
+              <a:noFill/>
+            </a:ln>
+          </p:spPr>
+          <p:txBody>
+            <a:bodyPr wrap="none" lIns="0" tIns="0" rIns="0" bIns="0" anchor="t" anchorCtr="0">
+              <a:spAutoFit/>
+            </a:bodyPr>
+            <a:lstStyle/>
+            <a:p>
+              <a:pPr algn="ctr"/>
+              <a:r>
+                <a:rPr lang="zh-CN" sz="1050" b="1" dirty="0">
+                  <a:solidFill>
+                    <a:srgbClr val="FFFFFF"/>
+                  </a:solidFill>
+                  <a:latin typeface="+mn-lt"/>
+                  <a:ea typeface="+mn-ea"/>
+                  <a:cs typeface="+mn-cs"/>
+                </a:rPr>
+                <a:t>抽出之后</a:t>
+              </a:r>
+            </a:p>
+          </p:txBody>
+        </p:sp>
+        <p:sp>
+          <p:nvSpPr>
+            <p:cNvPr id="34" name="TextBox 34"/>
+            <p:cNvSpPr txBox="1"/>
+            <p:nvPr/>
+          </p:nvSpPr>
+          <p:spPr>
+            <a:xfrm>
+              <a:off x="628078" y="4288155"/>
+              <a:ext cx="795263" cy="205359"/>
+            </a:xfrm>
+            <a:prstGeom prst="rect">
+              <a:avLst/>
+            </a:prstGeom>
+            <a:noFill/>
+            <a:ln>
+              <a:noFill/>
+            </a:ln>
+          </p:spPr>
+          <p:txBody>
+            <a:bodyPr wrap="none" lIns="0" tIns="0" rIns="0" bIns="0" anchor="t" anchorCtr="0">
+              <a:spAutoFit/>
+            </a:bodyPr>
+            <a:lstStyle/>
+            <a:p>
+              <a:pPr algn="l"/>
+              <a:r>
+                <a:rPr lang="zh-CN" sz="1050" b="1" dirty="0">
+                  <a:solidFill>
+                    <a:srgbClr val="1F2937"/>
+                  </a:solidFill>
+                  <a:latin typeface="+mn-lt"/>
+                  <a:ea typeface="+mn-ea"/>
+                  <a:cs typeface="+mn-cs"/>
+                </a:rPr>
+                <a:t>新增 Rabbit</a:t>
+              </a:r>
+            </a:p>
+          </p:txBody>
+        </p:sp>
+        <p:sp>
+          <p:nvSpPr>
+            <p:cNvPr id="35" name="TextBox 35"/>
+            <p:cNvSpPr txBox="1"/>
+            <p:nvPr/>
+          </p:nvSpPr>
+          <p:spPr>
+            <a:xfrm>
+              <a:off x="2186368" y="4288155"/>
+              <a:ext cx="1293495" cy="205359"/>
+            </a:xfrm>
+            <a:prstGeom prst="rect">
+              <a:avLst/>
+            </a:prstGeom>
+            <a:noFill/>
+            <a:ln>
+              <a:noFill/>
+            </a:ln>
+          </p:spPr>
+          <p:txBody>
+            <a:bodyPr wrap="none" lIns="0" tIns="0" rIns="0" bIns="0" anchor="t" anchorCtr="0">
+              <a:spAutoFit/>
+            </a:bodyPr>
+            <a:lstStyle/>
+            <a:p>
+              <a:pPr algn="l"/>
+              <a:r>
+                <a:rPr lang="zh-CN" sz="1050" dirty="0">
+                  <a:solidFill>
+                    <a:srgbClr val="1F2937"/>
+                  </a:solidFill>
+                  <a:latin typeface="+mn-lt"/>
+                  <a:ea typeface="+mn-ea"/>
+                  <a:cs typeface="+mn-cs"/>
+                </a:rPr>
+                <a:t>改 createAndUse()</a:t>
+              </a:r>
+            </a:p>
+          </p:txBody>
+        </p:sp>
+        <p:sp>
+          <p:nvSpPr>
+            <p:cNvPr id="36" name="Rectangle 36"/>
+            <p:cNvSpPr/>
+            <p:nvPr/>
+          </p:nvSpPr>
+          <p:spPr>
+            <a:xfrm>
+              <a:off x="3867150" y="4180522"/>
+              <a:ext cx="1850708" cy="361950"/>
+            </a:xfrm>
+            <a:prstGeom prst="rect">
+              <a:avLst/>
+            </a:prstGeom>
+            <a:solidFill>
+              <a:srgbClr val="E3F5F1"/>
+            </a:solidFill>
+            <a:ln>
+              <a:noFill/>
+            </a:ln>
+          </p:spPr>
+        </p:sp>
+        <p:sp>
+          <p:nvSpPr>
+            <p:cNvPr id="37" name="TextBox 37"/>
+            <p:cNvSpPr txBox="1"/>
+            <p:nvPr/>
+          </p:nvSpPr>
+          <p:spPr>
+            <a:xfrm>
+              <a:off x="3952304" y="4288155"/>
+              <a:ext cx="1170880" cy="205359"/>
+            </a:xfrm>
+            <a:prstGeom prst="rect">
+              <a:avLst/>
+            </a:prstGeom>
+            <a:noFill/>
+            <a:ln>
+              <a:noFill/>
+            </a:ln>
+          </p:spPr>
+          <p:txBody>
+            <a:bodyPr wrap="none" lIns="0" tIns="0" rIns="0" bIns="0" anchor="t" anchorCtr="0">
+              <a:spAutoFit/>
+            </a:bodyPr>
+            <a:lstStyle/>
+            <a:p>
+              <a:pPr algn="l"/>
+              <a:r>
+                <a:rPr lang="zh-CN" sz="1050" dirty="0">
+                  <a:solidFill>
+                    <a:srgbClr val="1F2937"/>
+                  </a:solidFill>
+                  <a:latin typeface="+mn-lt"/>
+                  <a:ea typeface="+mn-ea"/>
+                  <a:cs typeface="+mn-cs"/>
+                </a:rPr>
+                <a:t>新增 RabbitClient</a:t>
+              </a:r>
+            </a:p>
+          </p:txBody>
+        </p:sp>
+        <p:sp>
+          <p:nvSpPr>
+            <p:cNvPr id="38" name="Rectangle 38"/>
+            <p:cNvSpPr/>
+            <p:nvPr/>
+          </p:nvSpPr>
+          <p:spPr>
+            <a:xfrm>
+              <a:off x="533400" y="4547235"/>
+              <a:ext cx="5193982" cy="9525"/>
+            </a:xfrm>
+            <a:prstGeom prst="rect">
+              <a:avLst/>
+            </a:prstGeom>
+            <a:solidFill>
+              <a:srgbClr val="D9DFEA"/>
+            </a:solidFill>
+            <a:ln>
+              <a:noFill/>
+            </a:ln>
+          </p:spPr>
+        </p:sp>
+        <p:sp>
+          <p:nvSpPr>
+            <p:cNvPr id="39" name="Rectangle 39"/>
+            <p:cNvSpPr/>
+            <p:nvPr/>
+          </p:nvSpPr>
+          <p:spPr>
+            <a:xfrm>
+              <a:off x="533400" y="4551998"/>
+              <a:ext cx="5193982" cy="381000"/>
+            </a:xfrm>
+            <a:prstGeom prst="rect">
+              <a:avLst/>
+            </a:prstGeom>
+            <a:solidFill>
+              <a:srgbClr val="F4F6FB"/>
+            </a:solidFill>
+            <a:ln>
+              <a:noFill/>
+            </a:ln>
+          </p:spPr>
+        </p:sp>
+        <p:sp>
+          <p:nvSpPr>
+            <p:cNvPr id="40" name="TextBox 40"/>
+            <p:cNvSpPr txBox="1"/>
+            <p:nvPr/>
+          </p:nvSpPr>
+          <p:spPr>
+            <a:xfrm>
+              <a:off x="628078" y="4670108"/>
+              <a:ext cx="1258056" cy="205359"/>
+            </a:xfrm>
+            <a:prstGeom prst="rect">
+              <a:avLst/>
+            </a:prstGeom>
+            <a:noFill/>
+            <a:ln>
+              <a:noFill/>
+            </a:ln>
+          </p:spPr>
+          <p:txBody>
+            <a:bodyPr wrap="none" lIns="0" tIns="0" rIns="0" bIns="0" anchor="t" anchorCtr="0">
+              <a:spAutoFit/>
+            </a:bodyPr>
+            <a:lstStyle/>
+            <a:p>
+              <a:pPr algn="l"/>
+              <a:r>
+                <a:rPr lang="zh-CN" sz="1050" b="1" dirty="0">
+                  <a:solidFill>
+                    <a:srgbClr val="1F2937"/>
+                  </a:solidFill>
+                  <a:latin typeface="+mn-lt"/>
+                  <a:ea typeface="+mn-ea"/>
+                  <a:cs typeface="+mn-cs"/>
+                </a:rPr>
+                <a:t>Dog 换成 BlackDog</a:t>
+              </a:r>
+            </a:p>
+          </p:txBody>
+        </p:sp>
+        <p:sp>
+          <p:nvSpPr>
+            <p:cNvPr id="41" name="TextBox 41"/>
+            <p:cNvSpPr txBox="1"/>
+            <p:nvPr/>
+          </p:nvSpPr>
+          <p:spPr>
+            <a:xfrm>
+              <a:off x="2186368" y="4670108"/>
+              <a:ext cx="922382" cy="205359"/>
+            </a:xfrm>
+            <a:prstGeom prst="rect">
+              <a:avLst/>
+            </a:prstGeom>
+            <a:noFill/>
+            <a:ln>
+              <a:noFill/>
+            </a:ln>
+          </p:spPr>
+          <p:txBody>
+            <a:bodyPr wrap="none" lIns="0" tIns="0" rIns="0" bIns="0" anchor="t" anchorCtr="0">
+              <a:spAutoFit/>
+            </a:bodyPr>
+            <a:lstStyle/>
+            <a:p>
+              <a:pPr algn="l"/>
+              <a:r>
+                <a:rPr lang="zh-CN" sz="1050" dirty="0">
+                  <a:solidFill>
+                    <a:srgbClr val="1F2937"/>
+                  </a:solidFill>
+                  <a:latin typeface="+mn-lt"/>
+                  <a:ea typeface="+mn-ea"/>
+                  <a:cs typeface="+mn-cs"/>
+                </a:rPr>
+                <a:t>改 new 那一行</a:t>
+              </a:r>
+            </a:p>
+          </p:txBody>
+        </p:sp>
+        <p:sp>
+          <p:nvSpPr>
+            <p:cNvPr id="42" name="Rectangle 42"/>
+            <p:cNvSpPr/>
+            <p:nvPr/>
+          </p:nvSpPr>
+          <p:spPr>
+            <a:xfrm>
+              <a:off x="3867150" y="4561522"/>
+              <a:ext cx="1850708" cy="361950"/>
+            </a:xfrm>
+            <a:prstGeom prst="rect">
+              <a:avLst/>
+            </a:prstGeom>
+            <a:solidFill>
+              <a:srgbClr val="E3F5F1"/>
+            </a:solidFill>
+            <a:ln>
+              <a:noFill/>
+            </a:ln>
+          </p:spPr>
+        </p:sp>
+        <p:sp>
+          <p:nvSpPr>
+            <p:cNvPr id="43" name="TextBox 43"/>
+            <p:cNvSpPr txBox="1"/>
+            <p:nvPr/>
+          </p:nvSpPr>
+          <p:spPr>
+            <a:xfrm>
+              <a:off x="3952304" y="4670108"/>
+              <a:ext cx="1330595" cy="205359"/>
+            </a:xfrm>
+            <a:prstGeom prst="rect">
+              <a:avLst/>
+            </a:prstGeom>
+            <a:noFill/>
+            <a:ln>
+              <a:noFill/>
+            </a:ln>
+          </p:spPr>
+          <p:txBody>
+            <a:bodyPr wrap="none" lIns="0" tIns="0" rIns="0" bIns="0" anchor="t" anchorCtr="0">
+              <a:spAutoFit/>
+            </a:bodyPr>
+            <a:lstStyle/>
+            <a:p>
+              <a:pPr algn="l"/>
+              <a:r>
+                <a:rPr lang="zh-CN" sz="1050" dirty="0">
+                  <a:solidFill>
+                    <a:srgbClr val="1F2937"/>
+                  </a:solidFill>
+                  <a:latin typeface="+mn-lt"/>
+                  <a:ea typeface="+mn-ea"/>
+                  <a:cs typeface="+mn-cs"/>
+                </a:rPr>
+                <a:t>新增 BlackDogClient</a:t>
+              </a:r>
+            </a:p>
+          </p:txBody>
+        </p:sp>
+        <p:sp>
+          <p:nvSpPr>
+            <p:cNvPr id="44" name="Rectangle 44"/>
+            <p:cNvSpPr/>
+            <p:nvPr/>
+          </p:nvSpPr>
+          <p:spPr>
+            <a:xfrm>
+              <a:off x="533400" y="3789998"/>
+              <a:ext cx="5193982" cy="1143952"/>
+            </a:xfrm>
+            <a:prstGeom prst="rect">
+              <a:avLst/>
+            </a:prstGeom>
+            <a:noFill/>
+            <a:ln w="14288">
+              <a:solidFill>
+                <a:srgbClr val="D9DFEA"/>
+              </a:solidFill>
+            </a:ln>
+          </p:spPr>
+        </p:sp>
+        <p:sp>
+          <p:nvSpPr>
+            <p:cNvPr id="45" name="Rectangle 45"/>
+            <p:cNvSpPr/>
+            <p:nvPr/>
+          </p:nvSpPr>
+          <p:spPr>
+            <a:xfrm>
+              <a:off x="2086928" y="3789998"/>
+              <a:ext cx="9525" cy="1143952"/>
+            </a:xfrm>
+            <a:prstGeom prst="rect">
+              <a:avLst/>
+            </a:prstGeom>
+            <a:solidFill>
+              <a:srgbClr val="D9DFEA"/>
+            </a:solidFill>
+            <a:ln>
+              <a:noFill/>
+            </a:ln>
+          </p:spPr>
+        </p:sp>
+        <p:sp>
+          <p:nvSpPr>
+            <p:cNvPr id="46" name="Rectangle 46"/>
+            <p:cNvSpPr/>
+            <p:nvPr/>
+          </p:nvSpPr>
+          <p:spPr>
+            <a:xfrm>
+              <a:off x="3852862" y="3789998"/>
+              <a:ext cx="9525" cy="1143952"/>
+            </a:xfrm>
+            <a:prstGeom prst="rect">
+              <a:avLst/>
+            </a:prstGeom>
+            <a:solidFill>
+              <a:srgbClr val="D9DFEA"/>
+            </a:solidFill>
+            <a:ln>
+              <a:noFill/>
+            </a:ln>
+          </p:spPr>
+        </p:sp>
+      </p:grpSp>
+      <p:grpSp>
+        <p:nvGrpSpPr>
+          <p:cNvPr id="54" name="c1-callout-3"/>
+          <p:cNvGrpSpPr/>
+          <p:nvPr/>
+        </p:nvGrpSpPr>
+        <p:grpSpPr>
+          <a:xfrm>
+            <a:off x="533400" y="5098732"/>
+            <a:ext cx="5193982" cy="595312"/>
+            <a:chOff x="533400" y="5098732"/>
+            <a:chExt cx="5193982" cy="595312"/>
+          </a:xfrm>
+        </p:grpSpPr>
+        <p:sp>
+          <p:nvSpPr>
+            <p:cNvPr id="48" name="Rectangle 48"/>
+            <p:cNvSpPr/>
+            <p:nvPr/>
+          </p:nvSpPr>
+          <p:spPr>
+            <a:xfrm>
+              <a:off x="533400" y="5098732"/>
+              <a:ext cx="5193982" cy="595312"/>
             </a:xfrm>
             <a:prstGeom prst="roundRect">
               <a:avLst>
-                <a:gd name="adj" fmla="val 24440"/>
+                <a:gd name="adj" fmla="val 19200"/>
               </a:avLst>
             </a:prstGeom>
             <a:solidFill>
@@ -54615,27 +55254,27 @@
         </p:sp>
         <p:grpSp>
           <p:nvGrpSpPr>
-            <p:cNvPr id="34" name="Group 34"/>
+            <p:cNvPr id="52" name="Group 52"/>
             <p:cNvGrpSpPr/>
             <p:nvPr/>
           </p:nvGrpSpPr>
           <p:grpSpPr>
             <a:xfrm>
-              <a:off x="738188" y="3923348"/>
+              <a:off x="738188" y="5295900"/>
               <a:ext cx="200026" cy="200025"/>
-              <a:chOff x="738188" y="3923348"/>
+              <a:chOff x="738188" y="5295900"/>
               <a:chExt cx="200026" cy="200025"/>
             </a:xfrm>
           </p:grpSpPr>
           <p:sp>
             <p:nvSpPr>
-              <p:cNvPr id="31" name="Freeform 31"/>
+              <p:cNvPr id="49" name="Freeform 49"/>
               <p:cNvSpPr/>
               <p:nvPr/>
             </p:nvSpPr>
             <p:spPr>
               <a:xfrm>
-                <a:off x="738188" y="3923348"/>
+                <a:off x="738188" y="5295900"/>
                 <a:ext cx="200026" cy="100013"/>
               </a:xfrm>
               <a:custGeom>
@@ -54689,13 +55328,13 @@
           </p:sp>
           <p:sp>
             <p:nvSpPr>
-              <p:cNvPr id="32" name="Freeform 32"/>
+              <p:cNvPr id="50" name="Freeform 50"/>
               <p:cNvSpPr/>
               <p:nvPr/>
             </p:nvSpPr>
             <p:spPr>
               <a:xfrm>
-                <a:off x="777926" y="3967798"/>
+                <a:off x="777926" y="5340350"/>
                 <a:ext cx="120548" cy="155575"/>
               </a:xfrm>
               <a:custGeom>
@@ -54762,13 +55401,13 @@
           </p:sp>
           <p:sp>
             <p:nvSpPr>
-              <p:cNvPr id="33" name="Freeform 33"/>
+              <p:cNvPr id="51" name="Freeform 51"/>
               <p:cNvSpPr/>
               <p:nvPr/>
             </p:nvSpPr>
             <p:spPr>
               <a:xfrm>
-                <a:off x="812642" y="4078923"/>
+                <a:off x="812642" y="5451476"/>
                 <a:ext cx="51118" cy="9525"/>
               </a:xfrm>
               <a:custGeom>
@@ -54799,13 +55438,13 @@
         </p:grpSp>
         <p:sp>
           <p:nvSpPr>
-            <p:cNvPr id="35" name="TextBox 35"/>
-            <p:cNvSpPr txBox="1"/>
-            <p:nvPr/>
-          </p:nvSpPr>
-          <p:spPr>
-            <a:xfrm>
-              <a:off x="1041273" y="3934301"/>
+            <p:cNvPr id="53" name="TextBox 53"/>
+            <p:cNvSpPr txBox="1"/>
+            <p:nvPr/>
+          </p:nvSpPr>
+          <p:spPr>
+            <a:xfrm>
+              <a:off x="1041273" y="5306854"/>
               <a:ext cx="4148480" cy="249364"/>
             </a:xfrm>
             <a:prstGeom prst="rect">
@@ -54840,7 +55479,7 @@
       </p:grpSp>
       <p:grpSp>
         <p:nvGrpSpPr>
-          <p:cNvPr id="43" name="c2-card-1"/>
+          <p:cNvPr id="61" name="c2-card-1"/>
           <p:cNvGrpSpPr/>
           <p:nvPr/>
         </p:nvGrpSpPr>
@@ -54854,7 +55493,7 @@
         </p:grpSpPr>
         <p:sp>
           <p:nvSpPr>
-            <p:cNvPr id="37" name="Rectangle 37"/>
+            <p:cNvPr id="55" name="Rectangle 55"/>
             <p:cNvSpPr/>
             <p:nvPr/>
           </p:nvSpPr>
@@ -54880,7 +55519,7 @@
         </p:sp>
         <p:sp>
           <p:nvSpPr>
-            <p:cNvPr id="38" name="Rectangle 38"/>
+            <p:cNvPr id="56" name="Rectangle 56"/>
             <p:cNvSpPr/>
             <p:nvPr/>
           </p:nvSpPr>
@@ -54904,7 +55543,7 @@
         </p:sp>
         <p:sp>
           <p:nvSpPr>
-            <p:cNvPr id="39" name="Rectangle 39"/>
+            <p:cNvPr id="57" name="Rectangle 57"/>
             <p:cNvSpPr/>
             <p:nvPr/>
           </p:nvSpPr>
@@ -54928,7 +55567,7 @@
         </p:sp>
         <p:sp>
           <p:nvSpPr>
-            <p:cNvPr id="40" name="TextBox 40"/>
+            <p:cNvPr id="58" name="TextBox 58"/>
             <p:cNvSpPr txBox="1"/>
             <p:nvPr/>
           </p:nvSpPr>
@@ -54968,7 +55607,7 @@
         </p:sp>
         <p:sp>
           <p:nvSpPr>
-            <p:cNvPr id="41" name="TextBox 41"/>
+            <p:cNvPr id="59" name="TextBox 59"/>
             <p:cNvSpPr txBox="1"/>
             <p:nvPr/>
           </p:nvSpPr>
@@ -55008,7 +55647,7 @@
         </p:sp>
         <p:sp>
           <p:nvSpPr>
-            <p:cNvPr id="42" name="TextBox 42"/>
+            <p:cNvPr id="60" name="TextBox 60"/>
             <p:cNvSpPr txBox="1"/>
             <p:nvPr/>
           </p:nvSpPr>
@@ -55120,7 +55759,7 @@
       </p:grpSp>
       <p:grpSp>
         <p:nvGrpSpPr>
-          <p:cNvPr id="47" name="c2-code-2"/>
+          <p:cNvPr id="65" name="c2-code-2"/>
           <p:cNvGrpSpPr/>
           <p:nvPr/>
         </p:nvGrpSpPr>
@@ -55134,7 +55773,7 @@
         </p:grpSpPr>
         <p:sp>
           <p:nvSpPr>
-            <p:cNvPr id="44" name="Rectangle 44"/>
+            <p:cNvPr id="62" name="Rectangle 62"/>
             <p:cNvSpPr/>
             <p:nvPr/>
           </p:nvSpPr>
@@ -55160,7 +55799,7 @@
         </p:sp>
         <p:sp>
           <p:nvSpPr>
-            <p:cNvPr id="45" name="TextBox 45"/>
+            <p:cNvPr id="63" name="TextBox 63"/>
             <p:cNvSpPr txBox="1"/>
             <p:nvPr/>
           </p:nvSpPr>
@@ -55200,7 +55839,7 @@
         </p:sp>
         <p:sp>
           <p:nvSpPr>
-            <p:cNvPr id="46" name="TextBox 46"/>
+            <p:cNvPr id="64" name="TextBox 64"/>
             <p:cNvSpPr txBox="1"/>
             <p:nvPr/>
           </p:nvSpPr>
@@ -55640,7 +56279,7 @@
       </p:grpSp>
       <p:grpSp>
         <p:nvGrpSpPr>
-          <p:cNvPr id="54" name="takeaway"/>
+          <p:cNvPr id="72" name="takeaway"/>
           <p:cNvGrpSpPr/>
           <p:nvPr/>
         </p:nvGrpSpPr>
@@ -55654,7 +56293,7 @@
         </p:grpSpPr>
         <p:sp>
           <p:nvSpPr>
-            <p:cNvPr id="48" name="Rectangle 48"/>
+            <p:cNvPr id="66" name="Rectangle 66"/>
             <p:cNvSpPr/>
             <p:nvPr/>
           </p:nvSpPr>
@@ -55678,7 +56317,7 @@
         </p:sp>
         <p:grpSp>
           <p:nvGrpSpPr>
-            <p:cNvPr id="52" name="Group 52"/>
+            <p:cNvPr id="70" name="Group 70"/>
             <p:cNvGrpSpPr/>
             <p:nvPr/>
           </p:nvGrpSpPr>
@@ -55692,7 +56331,7 @@
           </p:grpSpPr>
           <p:sp>
             <p:nvSpPr>
-              <p:cNvPr id="49" name="Freeform 49"/>
+              <p:cNvPr id="67" name="Freeform 67"/>
               <p:cNvSpPr/>
               <p:nvPr/>
             </p:nvSpPr>
@@ -55745,7 +56384,7 @@
           </p:sp>
           <p:sp>
             <p:nvSpPr>
-              <p:cNvPr id="50" name="Freeform 50"/>
+              <p:cNvPr id="68" name="Freeform 68"/>
               <p:cNvSpPr/>
               <p:nvPr/>
             </p:nvSpPr>
@@ -55781,7 +56420,7 @@
           </p:sp>
           <p:sp>
             <p:nvSpPr>
-              <p:cNvPr id="51" name="Freeform 51"/>
+              <p:cNvPr id="69" name="Freeform 69"/>
               <p:cNvSpPr/>
               <p:nvPr/>
             </p:nvSpPr>
@@ -55824,7 +56463,7 @@
         </p:grpSp>
         <p:sp>
           <p:nvSpPr>
-            <p:cNvPr id="53" name="TextBox 53"/>
+            <p:cNvPr id="71" name="TextBox 71"/>
             <p:cNvSpPr txBox="1"/>
             <p:nvPr/>
           </p:nvSpPr>
@@ -55865,7 +56504,7 @@
       </p:grpSp>
       <p:grpSp>
         <p:nvGrpSpPr>
-          <p:cNvPr id="57" name="footer"/>
+          <p:cNvPr id="75" name="footer"/>
           <p:cNvGrpSpPr/>
           <p:nvPr/>
         </p:nvGrpSpPr>
@@ -55879,7 +56518,7 @@
         </p:grpSpPr>
         <p:sp>
           <p:nvSpPr>
-            <p:cNvPr id="55" name="TextBox 55"/>
+            <p:cNvPr id="73" name="TextBox 73"/>
             <p:cNvSpPr txBox="1"/>
             <p:nvPr/>
           </p:nvSpPr>
@@ -55919,7 +56558,7 @@
         </p:sp>
         <p:sp>
           <p:nvSpPr>
-            <p:cNvPr id="56" name="TextBox 56"/>
+            <p:cNvPr id="74" name="TextBox 74"/>
             <p:cNvSpPr txBox="1"/>
             <p:nvPr/>
           </p:nvSpPr>
